--- a/neat_results/v2a/esg_q4.pptx
+++ b/neat_results/v2a/esg_q4.pptx
@@ -1,9 +1,12 @@
 
 <file path=ppt/presentation.xml><?xml version="1.0" encoding="utf-8"?>
-<p:presentation xmlns:a="http://schemas.openxmlformats.org/drawingml/2006/main" xmlns:p="http://schemas.openxmlformats.org/presentationml/2006/main" xmlns:r="http://schemas.openxmlformats.org/officeDocument/2006/relationships" autoCompressPictures="0" saveSubsetFonts="1">
+<p:presentation xmlns:a="http://schemas.openxmlformats.org/drawingml/2006/main" xmlns:r="http://schemas.openxmlformats.org/officeDocument/2006/relationships" xmlns:p="http://schemas.openxmlformats.org/presentationml/2006/main" saveSubsetFonts="1" autoCompressPictures="0">
   <p:sldMasterIdLst>
     <p:sldMasterId id="2147483648" r:id="rId1"/>
   </p:sldMasterIdLst>
+  <p:notesMasterIdLst>
+    <p:notesMasterId r:id="rId21"/>
+  </p:notesMasterIdLst>
   <p:sldIdLst>
     <p:sldId id="256" r:id="rId2"/>
     <p:sldId id="257" r:id="rId3"/>
@@ -31,8 +34,8 @@
     <a:defPPr>
       <a:defRPr lang="en-US"/>
     </a:defPPr>
-    <a:lvl1pPr algn="l" defTabSz="457200" eaLnBrk="1" hangingPunct="1" latinLnBrk="0" marL="0" rtl="0">
-      <a:defRPr kern="1200" sz="1800">
+    <a:lvl1pPr marL="0" algn="l" defTabSz="457200" rtl="0" eaLnBrk="1" latinLnBrk="0" hangingPunct="1">
+      <a:defRPr sz="1800" kern="1200">
         <a:solidFill>
           <a:schemeClr val="tx1"/>
         </a:solidFill>
@@ -41,8 +44,8 @@
         <a:cs typeface="+mn-cs"/>
       </a:defRPr>
     </a:lvl1pPr>
-    <a:lvl2pPr algn="l" defTabSz="457200" eaLnBrk="1" hangingPunct="1" latinLnBrk="0" marL="457200" rtl="0">
-      <a:defRPr kern="1200" sz="1800">
+    <a:lvl2pPr marL="457200" algn="l" defTabSz="457200" rtl="0" eaLnBrk="1" latinLnBrk="0" hangingPunct="1">
+      <a:defRPr sz="1800" kern="1200">
         <a:solidFill>
           <a:schemeClr val="tx1"/>
         </a:solidFill>
@@ -51,8 +54,8 @@
         <a:cs typeface="+mn-cs"/>
       </a:defRPr>
     </a:lvl2pPr>
-    <a:lvl3pPr algn="l" defTabSz="457200" eaLnBrk="1" hangingPunct="1" latinLnBrk="0" marL="914400" rtl="0">
-      <a:defRPr kern="1200" sz="1800">
+    <a:lvl3pPr marL="914400" algn="l" defTabSz="457200" rtl="0" eaLnBrk="1" latinLnBrk="0" hangingPunct="1">
+      <a:defRPr sz="1800" kern="1200">
         <a:solidFill>
           <a:schemeClr val="tx1"/>
         </a:solidFill>
@@ -61,8 +64,8 @@
         <a:cs typeface="+mn-cs"/>
       </a:defRPr>
     </a:lvl3pPr>
-    <a:lvl4pPr algn="l" defTabSz="457200" eaLnBrk="1" hangingPunct="1" latinLnBrk="0" marL="1371600" rtl="0">
-      <a:defRPr kern="1200" sz="1800">
+    <a:lvl4pPr marL="1371600" algn="l" defTabSz="457200" rtl="0" eaLnBrk="1" latinLnBrk="0" hangingPunct="1">
+      <a:defRPr sz="1800" kern="1200">
         <a:solidFill>
           <a:schemeClr val="tx1"/>
         </a:solidFill>
@@ -71,8 +74,8 @@
         <a:cs typeface="+mn-cs"/>
       </a:defRPr>
     </a:lvl4pPr>
-    <a:lvl5pPr algn="l" defTabSz="457200" eaLnBrk="1" hangingPunct="1" latinLnBrk="0" marL="1828800" rtl="0">
-      <a:defRPr kern="1200" sz="1800">
+    <a:lvl5pPr marL="1828800" algn="l" defTabSz="457200" rtl="0" eaLnBrk="1" latinLnBrk="0" hangingPunct="1">
+      <a:defRPr sz="1800" kern="1200">
         <a:solidFill>
           <a:schemeClr val="tx1"/>
         </a:solidFill>
@@ -81,8 +84,8 @@
         <a:cs typeface="+mn-cs"/>
       </a:defRPr>
     </a:lvl5pPr>
-    <a:lvl6pPr algn="l" defTabSz="457200" eaLnBrk="1" hangingPunct="1" latinLnBrk="0" marL="2286000" rtl="0">
-      <a:defRPr kern="1200" sz="1800">
+    <a:lvl6pPr marL="2286000" algn="l" defTabSz="457200" rtl="0" eaLnBrk="1" latinLnBrk="0" hangingPunct="1">
+      <a:defRPr sz="1800" kern="1200">
         <a:solidFill>
           <a:schemeClr val="tx1"/>
         </a:solidFill>
@@ -91,8 +94,8 @@
         <a:cs typeface="+mn-cs"/>
       </a:defRPr>
     </a:lvl6pPr>
-    <a:lvl7pPr algn="l" defTabSz="457200" eaLnBrk="1" hangingPunct="1" latinLnBrk="0" marL="2743200" rtl="0">
-      <a:defRPr kern="1200" sz="1800">
+    <a:lvl7pPr marL="2743200" algn="l" defTabSz="457200" rtl="0" eaLnBrk="1" latinLnBrk="0" hangingPunct="1">
+      <a:defRPr sz="1800" kern="1200">
         <a:solidFill>
           <a:schemeClr val="tx1"/>
         </a:solidFill>
@@ -101,8 +104,8 @@
         <a:cs typeface="+mn-cs"/>
       </a:defRPr>
     </a:lvl7pPr>
-    <a:lvl8pPr algn="l" defTabSz="457200" eaLnBrk="1" hangingPunct="1" latinLnBrk="0" marL="3200400" rtl="0">
-      <a:defRPr kern="1200" sz="1800">
+    <a:lvl8pPr marL="3200400" algn="l" defTabSz="457200" rtl="0" eaLnBrk="1" latinLnBrk="0" hangingPunct="1">
+      <a:defRPr sz="1800" kern="1200">
         <a:solidFill>
           <a:schemeClr val="tx1"/>
         </a:solidFill>
@@ -111,8 +114,8 @@
         <a:cs typeface="+mn-cs"/>
       </a:defRPr>
     </a:lvl8pPr>
-    <a:lvl9pPr algn="l" defTabSz="457200" eaLnBrk="1" hangingPunct="1" latinLnBrk="0" marL="3657600" rtl="0">
-      <a:defRPr kern="1200" sz="1800">
+    <a:lvl9pPr marL="3657600" algn="l" defTabSz="457200" rtl="0" eaLnBrk="1" latinLnBrk="0" hangingPunct="1">
+      <a:defRPr sz="1800" kern="1200">
         <a:solidFill>
           <a:schemeClr val="tx1"/>
         </a:solidFill>
@@ -141,6 +144,440 @@
 </p:presentation>
 </file>
 
+<file path=ppt/notesMasters/notesMaster1.xml><?xml version="1.0" encoding="utf-8"?>
+<p:notesMaster xmlns:a="http://schemas.openxmlformats.org/drawingml/2006/main" xmlns:r="http://schemas.openxmlformats.org/officeDocument/2006/relationships" xmlns:p="http://schemas.openxmlformats.org/presentationml/2006/main">
+  <p:cSld>
+    <p:bg>
+      <p:bgRef idx="1001">
+        <a:schemeClr val="bg1"/>
+      </p:bgRef>
+    </p:bg>
+    <p:spTree>
+      <p:nvGrpSpPr>
+        <p:cNvPr id="1" name=""/>
+        <p:cNvGrpSpPr/>
+        <p:nvPr/>
+      </p:nvGrpSpPr>
+      <p:grpSpPr>
+        <a:xfrm>
+          <a:off x="0" y="0"/>
+          <a:ext cx="0" cy="0"/>
+          <a:chOff x="0" y="0"/>
+          <a:chExt cx="0" cy="0"/>
+        </a:xfrm>
+      </p:grpSpPr>
+      <p:sp>
+        <p:nvSpPr>
+          <p:cNvPr id="2" name="Header Placeholder 1"/>
+          <p:cNvSpPr>
+            <a:spLocks noGrp="1"/>
+          </p:cNvSpPr>
+          <p:nvPr>
+            <p:ph type="hdr" sz="quarter"/>
+          </p:nvPr>
+        </p:nvSpPr>
+        <p:spPr>
+          <a:xfrm>
+            <a:off x="0" y="0"/>
+            <a:ext cx="2971800" cy="458788"/>
+          </a:xfrm>
+          <a:prstGeom prst="rect">
+            <a:avLst/>
+          </a:prstGeom>
+        </p:spPr>
+        <p:txBody>
+          <a:bodyPr vert="horz" lIns="91440" tIns="45720" rIns="91440" bIns="45720" rtlCol="0"/>
+          <a:lstStyle>
+            <a:lvl1pPr algn="l">
+              <a:defRPr sz="1200"/>
+            </a:lvl1pPr>
+          </a:lstStyle>
+          <a:p>
+            <a:endParaRPr lang="en-US"/>
+          </a:p>
+        </p:txBody>
+      </p:sp>
+      <p:sp>
+        <p:nvSpPr>
+          <p:cNvPr id="3" name="Date Placeholder 2"/>
+          <p:cNvSpPr>
+            <a:spLocks noGrp="1"/>
+          </p:cNvSpPr>
+          <p:nvPr>
+            <p:ph type="dt" idx="1"/>
+          </p:nvPr>
+        </p:nvSpPr>
+        <p:spPr>
+          <a:xfrm>
+            <a:off x="3884613" y="0"/>
+            <a:ext cx="2971800" cy="458788"/>
+          </a:xfrm>
+          <a:prstGeom prst="rect">
+            <a:avLst/>
+          </a:prstGeom>
+        </p:spPr>
+        <p:txBody>
+          <a:bodyPr vert="horz" lIns="91440" tIns="45720" rIns="91440" bIns="45720" rtlCol="0"/>
+          <a:lstStyle>
+            <a:lvl1pPr algn="r">
+              <a:defRPr sz="1200"/>
+            </a:lvl1pPr>
+          </a:lstStyle>
+          <a:p>
+            <a:fld id="{56D8E5CF-2A5B-C44A-88AB-FE502A63B1BA}" type="datetimeFigureOut">
+              <a:rPr lang="en-US" smtClean="0"/>
+              <a:t>5/11/26</a:t>
+            </a:fld>
+            <a:endParaRPr lang="en-US"/>
+          </a:p>
+        </p:txBody>
+      </p:sp>
+      <p:sp>
+        <p:nvSpPr>
+          <p:cNvPr id="4" name="Slide Image Placeholder 3"/>
+          <p:cNvSpPr>
+            <a:spLocks noGrp="1" noRot="1" noChangeAspect="1"/>
+          </p:cNvSpPr>
+          <p:nvPr>
+            <p:ph type="sldImg" idx="2"/>
+          </p:nvPr>
+        </p:nvSpPr>
+        <p:spPr>
+          <a:xfrm>
+            <a:off x="685800" y="1143000"/>
+            <a:ext cx="5486400" cy="3086100"/>
+          </a:xfrm>
+          <a:prstGeom prst="rect">
+            <a:avLst/>
+          </a:prstGeom>
+          <a:noFill/>
+          <a:ln w="12700">
+            <a:solidFill>
+              <a:prstClr val="black"/>
+            </a:solidFill>
+          </a:ln>
+        </p:spPr>
+        <p:txBody>
+          <a:bodyPr vert="horz" lIns="91440" tIns="45720" rIns="91440" bIns="45720" rtlCol="0" anchor="ctr"/>
+          <a:lstStyle/>
+          <a:p>
+            <a:endParaRPr lang="en-US"/>
+          </a:p>
+        </p:txBody>
+      </p:sp>
+      <p:sp>
+        <p:nvSpPr>
+          <p:cNvPr id="5" name="Notes Placeholder 4"/>
+          <p:cNvSpPr>
+            <a:spLocks noGrp="1"/>
+          </p:cNvSpPr>
+          <p:nvPr>
+            <p:ph type="body" sz="quarter" idx="3"/>
+          </p:nvPr>
+        </p:nvSpPr>
+        <p:spPr>
+          <a:xfrm>
+            <a:off x="685800" y="4400550"/>
+            <a:ext cx="5486400" cy="3600450"/>
+          </a:xfrm>
+          <a:prstGeom prst="rect">
+            <a:avLst/>
+          </a:prstGeom>
+        </p:spPr>
+        <p:txBody>
+          <a:bodyPr vert="horz" lIns="91440" tIns="45720" rIns="91440" bIns="45720" rtlCol="0"/>
+          <a:lstStyle/>
+          <a:p>
+            <a:pPr lvl="0"/>
+            <a:r>
+              <a:rPr lang="en-GB"/>
+              <a:t>Click to edit Master text styles</a:t>
+            </a:r>
+          </a:p>
+          <a:p>
+            <a:pPr lvl="1"/>
+            <a:r>
+              <a:rPr lang="en-GB"/>
+              <a:t>Second level</a:t>
+            </a:r>
+          </a:p>
+          <a:p>
+            <a:pPr lvl="2"/>
+            <a:r>
+              <a:rPr lang="en-GB"/>
+              <a:t>Third level</a:t>
+            </a:r>
+          </a:p>
+          <a:p>
+            <a:pPr lvl="3"/>
+            <a:r>
+              <a:rPr lang="en-GB"/>
+              <a:t>Fourth level</a:t>
+            </a:r>
+          </a:p>
+          <a:p>
+            <a:pPr lvl="4"/>
+            <a:r>
+              <a:rPr lang="en-GB"/>
+              <a:t>Fifth level</a:t>
+            </a:r>
+            <a:endParaRPr lang="en-US"/>
+          </a:p>
+        </p:txBody>
+      </p:sp>
+      <p:sp>
+        <p:nvSpPr>
+          <p:cNvPr id="6" name="Footer Placeholder 5"/>
+          <p:cNvSpPr>
+            <a:spLocks noGrp="1"/>
+          </p:cNvSpPr>
+          <p:nvPr>
+            <p:ph type="ftr" sz="quarter" idx="4"/>
+          </p:nvPr>
+        </p:nvSpPr>
+        <p:spPr>
+          <a:xfrm>
+            <a:off x="0" y="8685213"/>
+            <a:ext cx="2971800" cy="458787"/>
+          </a:xfrm>
+          <a:prstGeom prst="rect">
+            <a:avLst/>
+          </a:prstGeom>
+        </p:spPr>
+        <p:txBody>
+          <a:bodyPr vert="horz" lIns="91440" tIns="45720" rIns="91440" bIns="45720" rtlCol="0" anchor="b"/>
+          <a:lstStyle>
+            <a:lvl1pPr algn="l">
+              <a:defRPr sz="1200"/>
+            </a:lvl1pPr>
+          </a:lstStyle>
+          <a:p>
+            <a:endParaRPr lang="en-US"/>
+          </a:p>
+        </p:txBody>
+      </p:sp>
+      <p:sp>
+        <p:nvSpPr>
+          <p:cNvPr id="7" name="Slide Number Placeholder 6"/>
+          <p:cNvSpPr>
+            <a:spLocks noGrp="1"/>
+          </p:cNvSpPr>
+          <p:nvPr>
+            <p:ph type="sldNum" sz="quarter" idx="5"/>
+          </p:nvPr>
+        </p:nvSpPr>
+        <p:spPr>
+          <a:xfrm>
+            <a:off x="3884613" y="8685213"/>
+            <a:ext cx="2971800" cy="458787"/>
+          </a:xfrm>
+          <a:prstGeom prst="rect">
+            <a:avLst/>
+          </a:prstGeom>
+        </p:spPr>
+        <p:txBody>
+          <a:bodyPr vert="horz" lIns="91440" tIns="45720" rIns="91440" bIns="45720" rtlCol="0" anchor="b"/>
+          <a:lstStyle>
+            <a:lvl1pPr algn="r">
+              <a:defRPr sz="1200"/>
+            </a:lvl1pPr>
+          </a:lstStyle>
+          <a:p>
+            <a:fld id="{D896B4E6-1855-3F4B-9A09-6B340CDBDB77}" type="slidenum">
+              <a:rPr lang="en-US" smtClean="0"/>
+              <a:t>‹#›</a:t>
+            </a:fld>
+            <a:endParaRPr lang="en-US"/>
+          </a:p>
+        </p:txBody>
+      </p:sp>
+    </p:spTree>
+    <p:extLst>
+      <p:ext uri="{BB962C8B-B14F-4D97-AF65-F5344CB8AC3E}">
+        <p14:creationId xmlns:p14="http://schemas.microsoft.com/office/powerpoint/2010/main" val="2203976132"/>
+      </p:ext>
+    </p:extLst>
+  </p:cSld>
+  <p:clrMap bg1="lt1" tx1="dk1" bg2="lt2" tx2="dk2" accent1="accent1" accent2="accent2" accent3="accent3" accent4="accent4" accent5="accent5" accent6="accent6" hlink="hlink" folHlink="folHlink"/>
+  <p:notesStyle>
+    <a:lvl1pPr marL="0" algn="l" defTabSz="914400" rtl="0" eaLnBrk="1" latinLnBrk="0" hangingPunct="1">
+      <a:defRPr sz="1200" kern="1200">
+        <a:solidFill>
+          <a:schemeClr val="tx1"/>
+        </a:solidFill>
+        <a:latin typeface="+mn-lt"/>
+        <a:ea typeface="+mn-ea"/>
+        <a:cs typeface="+mn-cs"/>
+      </a:defRPr>
+    </a:lvl1pPr>
+    <a:lvl2pPr marL="457200" algn="l" defTabSz="914400" rtl="0" eaLnBrk="1" latinLnBrk="0" hangingPunct="1">
+      <a:defRPr sz="1200" kern="1200">
+        <a:solidFill>
+          <a:schemeClr val="tx1"/>
+        </a:solidFill>
+        <a:latin typeface="+mn-lt"/>
+        <a:ea typeface="+mn-ea"/>
+        <a:cs typeface="+mn-cs"/>
+      </a:defRPr>
+    </a:lvl2pPr>
+    <a:lvl3pPr marL="914400" algn="l" defTabSz="914400" rtl="0" eaLnBrk="1" latinLnBrk="0" hangingPunct="1">
+      <a:defRPr sz="1200" kern="1200">
+        <a:solidFill>
+          <a:schemeClr val="tx1"/>
+        </a:solidFill>
+        <a:latin typeface="+mn-lt"/>
+        <a:ea typeface="+mn-ea"/>
+        <a:cs typeface="+mn-cs"/>
+      </a:defRPr>
+    </a:lvl3pPr>
+    <a:lvl4pPr marL="1371600" algn="l" defTabSz="914400" rtl="0" eaLnBrk="1" latinLnBrk="0" hangingPunct="1">
+      <a:defRPr sz="1200" kern="1200">
+        <a:solidFill>
+          <a:schemeClr val="tx1"/>
+        </a:solidFill>
+        <a:latin typeface="+mn-lt"/>
+        <a:ea typeface="+mn-ea"/>
+        <a:cs typeface="+mn-cs"/>
+      </a:defRPr>
+    </a:lvl4pPr>
+    <a:lvl5pPr marL="1828800" algn="l" defTabSz="914400" rtl="0" eaLnBrk="1" latinLnBrk="0" hangingPunct="1">
+      <a:defRPr sz="1200" kern="1200">
+        <a:solidFill>
+          <a:schemeClr val="tx1"/>
+        </a:solidFill>
+        <a:latin typeface="+mn-lt"/>
+        <a:ea typeface="+mn-ea"/>
+        <a:cs typeface="+mn-cs"/>
+      </a:defRPr>
+    </a:lvl5pPr>
+    <a:lvl6pPr marL="2286000" algn="l" defTabSz="914400" rtl="0" eaLnBrk="1" latinLnBrk="0" hangingPunct="1">
+      <a:defRPr sz="1200" kern="1200">
+        <a:solidFill>
+          <a:schemeClr val="tx1"/>
+        </a:solidFill>
+        <a:latin typeface="+mn-lt"/>
+        <a:ea typeface="+mn-ea"/>
+        <a:cs typeface="+mn-cs"/>
+      </a:defRPr>
+    </a:lvl6pPr>
+    <a:lvl7pPr marL="2743200" algn="l" defTabSz="914400" rtl="0" eaLnBrk="1" latinLnBrk="0" hangingPunct="1">
+      <a:defRPr sz="1200" kern="1200">
+        <a:solidFill>
+          <a:schemeClr val="tx1"/>
+        </a:solidFill>
+        <a:latin typeface="+mn-lt"/>
+        <a:ea typeface="+mn-ea"/>
+        <a:cs typeface="+mn-cs"/>
+      </a:defRPr>
+    </a:lvl7pPr>
+    <a:lvl8pPr marL="3200400" algn="l" defTabSz="914400" rtl="0" eaLnBrk="1" latinLnBrk="0" hangingPunct="1">
+      <a:defRPr sz="1200" kern="1200">
+        <a:solidFill>
+          <a:schemeClr val="tx1"/>
+        </a:solidFill>
+        <a:latin typeface="+mn-lt"/>
+        <a:ea typeface="+mn-ea"/>
+        <a:cs typeface="+mn-cs"/>
+      </a:defRPr>
+    </a:lvl8pPr>
+    <a:lvl9pPr marL="3657600" algn="l" defTabSz="914400" rtl="0" eaLnBrk="1" latinLnBrk="0" hangingPunct="1">
+      <a:defRPr sz="1200" kern="1200">
+        <a:solidFill>
+          <a:schemeClr val="tx1"/>
+        </a:solidFill>
+        <a:latin typeface="+mn-lt"/>
+        <a:ea typeface="+mn-ea"/>
+        <a:cs typeface="+mn-cs"/>
+      </a:defRPr>
+    </a:lvl9pPr>
+  </p:notesStyle>
+</p:notesMaster>
+</file>
+
+<file path=ppt/notesSlides/notesSlide1.xml><?xml version="1.0" encoding="utf-8"?>
+<p:notes xmlns:a="http://schemas.openxmlformats.org/drawingml/2006/main" xmlns:r="http://schemas.openxmlformats.org/officeDocument/2006/relationships" xmlns:p="http://schemas.openxmlformats.org/presentationml/2006/main">
+  <p:cSld>
+    <p:spTree>
+      <p:nvGrpSpPr>
+        <p:cNvPr id="1" name=""/>
+        <p:cNvGrpSpPr/>
+        <p:nvPr/>
+      </p:nvGrpSpPr>
+      <p:grpSpPr>
+        <a:xfrm>
+          <a:off x="0" y="0"/>
+          <a:ext cx="0" cy="0"/>
+          <a:chOff x="0" y="0"/>
+          <a:chExt cx="0" cy="0"/>
+        </a:xfrm>
+      </p:grpSpPr>
+      <p:sp>
+        <p:nvSpPr>
+          <p:cNvPr id="2" name="Slide Image Placeholder 1"/>
+          <p:cNvSpPr>
+            <a:spLocks noGrp="1" noRot="1" noChangeAspect="1"/>
+          </p:cNvSpPr>
+          <p:nvPr>
+            <p:ph type="sldImg"/>
+          </p:nvPr>
+        </p:nvSpPr>
+        <p:spPr/>
+      </p:sp>
+      <p:sp>
+        <p:nvSpPr>
+          <p:cNvPr id="3" name="Notes Placeholder 2"/>
+          <p:cNvSpPr>
+            <a:spLocks noGrp="1"/>
+          </p:cNvSpPr>
+          <p:nvPr>
+            <p:ph type="body" idx="1"/>
+          </p:nvPr>
+        </p:nvSpPr>
+        <p:spPr/>
+        <p:txBody>
+          <a:bodyPr/>
+          <a:lstStyle/>
+          <a:p>
+            <a:endParaRPr lang="en-US"/>
+          </a:p>
+        </p:txBody>
+      </p:sp>
+      <p:sp>
+        <p:nvSpPr>
+          <p:cNvPr id="4" name="Slide Number Placeholder 3"/>
+          <p:cNvSpPr>
+            <a:spLocks noGrp="1"/>
+          </p:cNvSpPr>
+          <p:nvPr>
+            <p:ph type="sldNum" sz="quarter" idx="5"/>
+          </p:nvPr>
+        </p:nvSpPr>
+        <p:spPr/>
+        <p:txBody>
+          <a:bodyPr/>
+          <a:lstStyle/>
+          <a:p>
+            <a:fld id="{D896B4E6-1855-3F4B-9A09-6B340CDBDB77}" type="slidenum">
+              <a:rPr lang="en-US" smtClean="0"/>
+              <a:t>7</a:t>
+            </a:fld>
+            <a:endParaRPr lang="en-US"/>
+          </a:p>
+        </p:txBody>
+      </p:sp>
+    </p:spTree>
+    <p:extLst>
+      <p:ext uri="{BB962C8B-B14F-4D97-AF65-F5344CB8AC3E}">
+        <p14:creationId xmlns:p14="http://schemas.microsoft.com/office/powerpoint/2010/main" val="143203522"/>
+      </p:ext>
+    </p:extLst>
+  </p:cSld>
+  <p:clrMapOvr>
+    <a:masterClrMapping/>
+  </p:clrMapOvr>
+</p:notes>
+</file>
+
 <file path=ppt/slideLayouts/slideLayout1.xml><?xml version="1.0" encoding="utf-8"?>
 <p:sldLayout xmlns:a="http://schemas.openxmlformats.org/drawingml/2006/main" xmlns:r="http://schemas.openxmlformats.org/officeDocument/2006/relationships" xmlns:p="http://schemas.openxmlformats.org/presentationml/2006/main" type="title" preserve="1">
   <p:cSld name="Title Slide">
@@ -320,7 +757,7 @@
           <a:p>
             <a:fld id="{241EB5C9-1307-BA42-ABA2-0BC069CD8E7F}" type="datetimeFigureOut">
               <a:rPr lang="en-US" smtClean="0"/>
-              <a:t>1/2/22</a:t>
+              <a:t>5/8/26</a:t>
             </a:fld>
             <a:endParaRPr lang="en-US"/>
           </a:p>
@@ -488,7 +925,7 @@
           <a:p>
             <a:fld id="{241EB5C9-1307-BA42-ABA2-0BC069CD8E7F}" type="datetimeFigureOut">
               <a:rPr lang="en-US" smtClean="0"/>
-              <a:t>1/2/22</a:t>
+              <a:t>5/8/26</a:t>
             </a:fld>
             <a:endParaRPr lang="en-US"/>
           </a:p>
@@ -666,7 +1103,7 @@
           <a:p>
             <a:fld id="{241EB5C9-1307-BA42-ABA2-0BC069CD8E7F}" type="datetimeFigureOut">
               <a:rPr lang="en-US" smtClean="0"/>
-              <a:t>1/2/22</a:t>
+              <a:t>5/8/26</a:t>
             </a:fld>
             <a:endParaRPr lang="en-US"/>
           </a:p>
@@ -834,7 +1271,7 @@
           <a:p>
             <a:fld id="{241EB5C9-1307-BA42-ABA2-0BC069CD8E7F}" type="datetimeFigureOut">
               <a:rPr lang="en-US" smtClean="0"/>
-              <a:t>1/2/22</a:t>
+              <a:t>5/8/26</a:t>
             </a:fld>
             <a:endParaRPr lang="en-US"/>
           </a:p>
@@ -1079,7 +1516,7 @@
           <a:p>
             <a:fld id="{241EB5C9-1307-BA42-ABA2-0BC069CD8E7F}" type="datetimeFigureOut">
               <a:rPr lang="en-US" smtClean="0"/>
-              <a:t>1/2/22</a:t>
+              <a:t>5/8/26</a:t>
             </a:fld>
             <a:endParaRPr lang="en-US"/>
           </a:p>
@@ -1364,7 +1801,7 @@
           <a:p>
             <a:fld id="{241EB5C9-1307-BA42-ABA2-0BC069CD8E7F}" type="datetimeFigureOut">
               <a:rPr lang="en-US" smtClean="0"/>
-              <a:t>1/2/22</a:t>
+              <a:t>5/8/26</a:t>
             </a:fld>
             <a:endParaRPr lang="en-US"/>
           </a:p>
@@ -1783,7 +2220,7 @@
           <a:p>
             <a:fld id="{241EB5C9-1307-BA42-ABA2-0BC069CD8E7F}" type="datetimeFigureOut">
               <a:rPr lang="en-US" smtClean="0"/>
-              <a:t>1/2/22</a:t>
+              <a:t>5/8/26</a:t>
             </a:fld>
             <a:endParaRPr lang="en-US"/>
           </a:p>
@@ -1900,7 +2337,7 @@
           <a:p>
             <a:fld id="{241EB5C9-1307-BA42-ABA2-0BC069CD8E7F}" type="datetimeFigureOut">
               <a:rPr lang="en-US" smtClean="0"/>
-              <a:t>1/2/22</a:t>
+              <a:t>5/8/26</a:t>
             </a:fld>
             <a:endParaRPr lang="en-US"/>
           </a:p>
@@ -1995,7 +2432,7 @@
           <a:p>
             <a:fld id="{241EB5C9-1307-BA42-ABA2-0BC069CD8E7F}" type="datetimeFigureOut">
               <a:rPr lang="en-US" smtClean="0"/>
-              <a:t>1/2/22</a:t>
+              <a:t>5/8/26</a:t>
             </a:fld>
             <a:endParaRPr lang="en-US"/>
           </a:p>
@@ -2270,7 +2707,7 @@
           <a:p>
             <a:fld id="{241EB5C9-1307-BA42-ABA2-0BC069CD8E7F}" type="datetimeFigureOut">
               <a:rPr lang="en-US" smtClean="0"/>
-              <a:t>1/2/22</a:t>
+              <a:t>5/8/26</a:t>
             </a:fld>
             <a:endParaRPr lang="en-US"/>
           </a:p>
@@ -2522,7 +2959,7 @@
           <a:p>
             <a:fld id="{241EB5C9-1307-BA42-ABA2-0BC069CD8E7F}" type="datetimeFigureOut">
               <a:rPr lang="en-US" smtClean="0"/>
-              <a:t>1/2/22</a:t>
+              <a:t>5/8/26</a:t>
             </a:fld>
             <a:endParaRPr lang="en-US"/>
           </a:p>
@@ -2584,7 +3021,7 @@
 </file>
 
 <file path=ppt/slideMasters/slideMaster1.xml><?xml version="1.0" encoding="utf-8"?>
-<p:sldMaster xmlns:a="http://schemas.openxmlformats.org/drawingml/2006/main" xmlns:p="http://schemas.openxmlformats.org/presentationml/2006/main" xmlns:r="http://schemas.openxmlformats.org/officeDocument/2006/relationships">
+<p:sldMaster xmlns:a="http://schemas.openxmlformats.org/drawingml/2006/main" xmlns:r="http://schemas.openxmlformats.org/officeDocument/2006/relationships" xmlns:p="http://schemas.openxmlformats.org/presentationml/2006/main">
   <p:cSld>
     <p:bg>
       <p:bgRef idx="1001">
@@ -2625,7 +3062,7 @@
           </a:prstGeom>
         </p:spPr>
         <p:txBody>
-          <a:bodyPr anchor="ctr" bIns="45720" lIns="91440" rIns="91440" rtlCol="0" tIns="45720" vert="horz">
+          <a:bodyPr vert="horz" lIns="91440" tIns="45720" rIns="91440" bIns="45720" rtlCol="0" anchor="ctr">
             <a:normAutofit/>
           </a:bodyPr>
           <a:lstStyle/>
@@ -2644,7 +3081,7 @@
             <a:spLocks noGrp="1"/>
           </p:cNvSpPr>
           <p:nvPr>
-            <p:ph idx="1" type="body"/>
+            <p:ph type="body" idx="1"/>
           </p:nvPr>
         </p:nvSpPr>
         <p:spPr>
@@ -2657,7 +3094,7 @@
           </a:prstGeom>
         </p:spPr>
         <p:txBody>
-          <a:bodyPr bIns="45720" lIns="91440" rIns="91440" rtlCol="0" tIns="45720" vert="horz">
+          <a:bodyPr vert="horz" lIns="91440" tIns="45720" rIns="91440" bIns="45720" rtlCol="0">
             <a:normAutofit/>
           </a:bodyPr>
           <a:lstStyle/>
@@ -2705,7 +3142,7 @@
             <a:spLocks noGrp="1"/>
           </p:cNvSpPr>
           <p:nvPr>
-            <p:ph idx="2" sz="half" type="dt"/>
+            <p:ph type="dt" sz="half" idx="2"/>
           </p:nvPr>
         </p:nvSpPr>
         <p:spPr>
@@ -2718,7 +3155,7 @@
           </a:prstGeom>
         </p:spPr>
         <p:txBody>
-          <a:bodyPr anchor="ctr" bIns="45720" lIns="91440" rIns="91440" rtlCol="0" tIns="45720" vert="horz"/>
+          <a:bodyPr vert="horz" lIns="91440" tIns="45720" rIns="91440" bIns="45720" rtlCol="0" anchor="ctr"/>
           <a:lstStyle>
             <a:lvl1pPr algn="l">
               <a:defRPr sz="900">
@@ -2733,7 +3170,7 @@
           <a:p>
             <a:fld id="{241EB5C9-1307-BA42-ABA2-0BC069CD8E7F}" type="datetimeFigureOut">
               <a:rPr lang="en-US" smtClean="0"/>
-              <a:t>1/2/22</a:t>
+              <a:t>5/8/26</a:t>
             </a:fld>
             <a:endParaRPr lang="en-US"/>
           </a:p>
@@ -2746,7 +3183,7 @@
             <a:spLocks noGrp="1"/>
           </p:cNvSpPr>
           <p:nvPr>
-            <p:ph idx="3" sz="quarter" type="ftr"/>
+            <p:ph type="ftr" sz="quarter" idx="3"/>
           </p:nvPr>
         </p:nvSpPr>
         <p:spPr>
@@ -2759,7 +3196,7 @@
           </a:prstGeom>
         </p:spPr>
         <p:txBody>
-          <a:bodyPr anchor="ctr" bIns="45720" lIns="91440" rIns="91440" rtlCol="0" tIns="45720" vert="horz"/>
+          <a:bodyPr vert="horz" lIns="91440" tIns="45720" rIns="91440" bIns="45720" rtlCol="0" anchor="ctr"/>
           <a:lstStyle>
             <a:lvl1pPr algn="ctr">
               <a:defRPr sz="900">
@@ -2783,7 +3220,7 @@
             <a:spLocks noGrp="1"/>
           </p:cNvSpPr>
           <p:nvPr>
-            <p:ph idx="4" sz="quarter" type="sldNum"/>
+            <p:ph type="sldNum" sz="quarter" idx="4"/>
           </p:nvPr>
         </p:nvSpPr>
         <p:spPr>
@@ -2796,7 +3233,7 @@
           </a:prstGeom>
         </p:spPr>
         <p:txBody>
-          <a:bodyPr anchor="ctr" bIns="45720" lIns="91440" rIns="91440" rtlCol="0" tIns="45720" vert="horz"/>
+          <a:bodyPr vert="horz" lIns="91440" tIns="45720" rIns="91440" bIns="45720" rtlCol="0" anchor="ctr"/>
           <a:lstStyle>
             <a:lvl1pPr algn="r">
               <a:defRPr sz="900">
@@ -2824,7 +3261,7 @@
       </p:ext>
     </p:extLst>
   </p:cSld>
-  <p:clrMap accent1="accent1" accent2="accent2" accent3="accent3" accent4="accent4" accent5="accent5" accent6="accent6" bg1="lt1" bg2="lt2" folHlink="folHlink" hlink="hlink" tx1="dk1" tx2="dk2"/>
+  <p:clrMap bg1="lt1" tx1="dk1" bg2="lt2" tx2="dk2" accent1="accent1" accent2="accent2" accent3="accent3" accent4="accent4" accent5="accent5" accent6="accent6" hlink="hlink" folHlink="folHlink"/>
   <p:sldLayoutIdLst>
     <p:sldLayoutId id="2147483649" r:id="rId1"/>
     <p:sldLayoutId id="2147483650" r:id="rId2"/>
@@ -2840,12 +3277,12 @@
   </p:sldLayoutIdLst>
   <p:txStyles>
     <p:titleStyle>
-      <a:lvl1pPr algn="ctr" defTabSz="342900" eaLnBrk="1" hangingPunct="1" latinLnBrk="0" rtl="0">
+      <a:lvl1pPr algn="ctr" defTabSz="342900" rtl="0" eaLnBrk="1" latinLnBrk="0" hangingPunct="1">
         <a:spcBef>
           <a:spcPct val="0"/>
         </a:spcBef>
         <a:buNone/>
-        <a:defRPr kern="1200" sz="3300">
+        <a:defRPr sz="3300" kern="1200">
           <a:solidFill>
             <a:schemeClr val="tx1"/>
           </a:solidFill>
@@ -2856,13 +3293,13 @@
       </a:lvl1pPr>
     </p:titleStyle>
     <p:bodyStyle>
-      <a:lvl1pPr algn="l" defTabSz="342900" eaLnBrk="1" hangingPunct="1" indent="-342900" latinLnBrk="0" marL="342900" rtl="0">
+      <a:lvl1pPr marL="342900" indent="-342900" algn="l" defTabSz="342900" rtl="0" eaLnBrk="1" latinLnBrk="0" hangingPunct="1">
         <a:spcBef>
           <a:spcPct val="20000"/>
         </a:spcBef>
         <a:buFont typeface="Arial"/>
         <a:buChar char="•"/>
-        <a:defRPr kern="1200" sz="2400">
+        <a:defRPr sz="2400" kern="1200">
           <a:solidFill>
             <a:schemeClr val="tx1"/>
           </a:solidFill>
@@ -2871,13 +3308,13 @@
           <a:cs typeface="+mn-cs"/>
         </a:defRPr>
       </a:lvl1pPr>
-      <a:lvl2pPr algn="l" defTabSz="342900" eaLnBrk="1" hangingPunct="1" indent="-342900" latinLnBrk="0" marL="685800" rtl="0">
+      <a:lvl2pPr marL="685800" indent="-342900" algn="l" defTabSz="342900" rtl="0" eaLnBrk="1" latinLnBrk="0" hangingPunct="1">
         <a:spcBef>
           <a:spcPct val="20000"/>
         </a:spcBef>
         <a:buFont typeface="Arial"/>
         <a:buChar char="–"/>
-        <a:defRPr kern="1200" sz="2100">
+        <a:defRPr sz="2100" kern="1200">
           <a:solidFill>
             <a:schemeClr val="tx1"/>
           </a:solidFill>
@@ -2886,13 +3323,13 @@
           <a:cs typeface="+mn-cs"/>
         </a:defRPr>
       </a:lvl2pPr>
-      <a:lvl3pPr algn="l" defTabSz="342900" eaLnBrk="1" hangingPunct="1" indent="-342900" latinLnBrk="0" marL="1028700" rtl="0">
+      <a:lvl3pPr marL="1028700" indent="-342900" algn="l" defTabSz="342900" rtl="0" eaLnBrk="1" latinLnBrk="0" hangingPunct="1">
         <a:spcBef>
           <a:spcPct val="20000"/>
         </a:spcBef>
         <a:buFont typeface="Arial"/>
         <a:buChar char="•"/>
-        <a:defRPr kern="1200" sz="1800">
+        <a:defRPr sz="1800" kern="1200">
           <a:solidFill>
             <a:schemeClr val="tx1"/>
           </a:solidFill>
@@ -2901,13 +3338,13 @@
           <a:cs typeface="+mn-cs"/>
         </a:defRPr>
       </a:lvl3pPr>
-      <a:lvl4pPr algn="l" defTabSz="342900" eaLnBrk="1" hangingPunct="1" indent="-342900" latinLnBrk="0" marL="1371600" rtl="0">
+      <a:lvl4pPr marL="1371600" indent="-342900" algn="l" defTabSz="342900" rtl="0" eaLnBrk="1" latinLnBrk="0" hangingPunct="1">
         <a:spcBef>
           <a:spcPct val="20000"/>
         </a:spcBef>
         <a:buFont typeface="Arial"/>
         <a:buChar char="–"/>
-        <a:defRPr kern="1200" sz="1500">
+        <a:defRPr sz="1500" kern="1200">
           <a:solidFill>
             <a:schemeClr val="tx1"/>
           </a:solidFill>
@@ -2916,13 +3353,13 @@
           <a:cs typeface="+mn-cs"/>
         </a:defRPr>
       </a:lvl4pPr>
-      <a:lvl5pPr algn="l" defTabSz="342900" eaLnBrk="1" hangingPunct="1" indent="-342900" latinLnBrk="0" marL="1714500" rtl="0">
+      <a:lvl5pPr marL="1714500" indent="-342900" algn="l" defTabSz="342900" rtl="0" eaLnBrk="1" latinLnBrk="0" hangingPunct="1">
         <a:spcBef>
           <a:spcPct val="20000"/>
         </a:spcBef>
         <a:buFont typeface="Arial"/>
         <a:buChar char="»"/>
-        <a:defRPr kern="1200" sz="1500">
+        <a:defRPr sz="1500" kern="1200">
           <a:solidFill>
             <a:schemeClr val="tx1"/>
           </a:solidFill>
@@ -2931,13 +3368,13 @@
           <a:cs typeface="+mn-cs"/>
         </a:defRPr>
       </a:lvl5pPr>
-      <a:lvl6pPr algn="l" defTabSz="342900" eaLnBrk="1" hangingPunct="1" indent="-342900" latinLnBrk="0" marL="2057400" rtl="0">
+      <a:lvl6pPr marL="2057400" indent="-342900" algn="l" defTabSz="342900" rtl="0" eaLnBrk="1" latinLnBrk="0" hangingPunct="1">
         <a:spcBef>
           <a:spcPct val="20000"/>
         </a:spcBef>
         <a:buFont typeface="Arial"/>
         <a:buChar char="•"/>
-        <a:defRPr kern="1200" sz="1500">
+        <a:defRPr sz="1500" kern="1200">
           <a:solidFill>
             <a:schemeClr val="tx1"/>
           </a:solidFill>
@@ -2946,13 +3383,13 @@
           <a:cs typeface="+mn-cs"/>
         </a:defRPr>
       </a:lvl6pPr>
-      <a:lvl7pPr algn="l" defTabSz="342900" eaLnBrk="1" hangingPunct="1" indent="-342900" latinLnBrk="0" marL="2400300" rtl="0">
+      <a:lvl7pPr marL="2400300" indent="-342900" algn="l" defTabSz="342900" rtl="0" eaLnBrk="1" latinLnBrk="0" hangingPunct="1">
         <a:spcBef>
           <a:spcPct val="20000"/>
         </a:spcBef>
         <a:buFont typeface="Arial"/>
         <a:buChar char="•"/>
-        <a:defRPr kern="1200" sz="1500">
+        <a:defRPr sz="1500" kern="1200">
           <a:solidFill>
             <a:schemeClr val="tx1"/>
           </a:solidFill>
@@ -2961,13 +3398,13 @@
           <a:cs typeface="+mn-cs"/>
         </a:defRPr>
       </a:lvl7pPr>
-      <a:lvl8pPr algn="l" defTabSz="342900" eaLnBrk="1" hangingPunct="1" indent="-342900" latinLnBrk="0" marL="2743200" rtl="0">
+      <a:lvl8pPr marL="2743200" indent="-342900" algn="l" defTabSz="342900" rtl="0" eaLnBrk="1" latinLnBrk="0" hangingPunct="1">
         <a:spcBef>
           <a:spcPct val="20000"/>
         </a:spcBef>
         <a:buFont typeface="Arial"/>
         <a:buChar char="•"/>
-        <a:defRPr kern="1200" sz="1500">
+        <a:defRPr sz="1500" kern="1200">
           <a:solidFill>
             <a:schemeClr val="tx1"/>
           </a:solidFill>
@@ -2976,13 +3413,13 @@
           <a:cs typeface="+mn-cs"/>
         </a:defRPr>
       </a:lvl8pPr>
-      <a:lvl9pPr algn="l" defTabSz="342900" eaLnBrk="1" hangingPunct="1" indent="-342900" latinLnBrk="0" marL="3086100" rtl="0">
+      <a:lvl9pPr marL="3086100" indent="-342900" algn="l" defTabSz="342900" rtl="0" eaLnBrk="1" latinLnBrk="0" hangingPunct="1">
         <a:spcBef>
           <a:spcPct val="20000"/>
         </a:spcBef>
         <a:buFont typeface="Arial"/>
         <a:buChar char="•"/>
-        <a:defRPr kern="1200" sz="1500">
+        <a:defRPr sz="1500" kern="1200">
           <a:solidFill>
             <a:schemeClr val="tx1"/>
           </a:solidFill>
@@ -2996,8 +3433,8 @@
       <a:defPPr>
         <a:defRPr lang="en-US"/>
       </a:defPPr>
-      <a:lvl1pPr algn="l" defTabSz="342900" eaLnBrk="1" hangingPunct="1" latinLnBrk="0" marL="0" rtl="0">
-        <a:defRPr kern="1200" sz="1350">
+      <a:lvl1pPr marL="0" algn="l" defTabSz="342900" rtl="0" eaLnBrk="1" latinLnBrk="0" hangingPunct="1">
+        <a:defRPr sz="1350" kern="1200">
           <a:solidFill>
             <a:schemeClr val="tx1"/>
           </a:solidFill>
@@ -3006,8 +3443,8 @@
           <a:cs typeface="+mn-cs"/>
         </a:defRPr>
       </a:lvl1pPr>
-      <a:lvl2pPr algn="l" defTabSz="342900" eaLnBrk="1" hangingPunct="1" latinLnBrk="0" marL="342900" rtl="0">
-        <a:defRPr kern="1200" sz="1350">
+      <a:lvl2pPr marL="342900" algn="l" defTabSz="342900" rtl="0" eaLnBrk="1" latinLnBrk="0" hangingPunct="1">
+        <a:defRPr sz="1350" kern="1200">
           <a:solidFill>
             <a:schemeClr val="tx1"/>
           </a:solidFill>
@@ -3016,8 +3453,8 @@
           <a:cs typeface="+mn-cs"/>
         </a:defRPr>
       </a:lvl2pPr>
-      <a:lvl3pPr algn="l" defTabSz="342900" eaLnBrk="1" hangingPunct="1" latinLnBrk="0" marL="685800" rtl="0">
-        <a:defRPr kern="1200" sz="1350">
+      <a:lvl3pPr marL="685800" algn="l" defTabSz="342900" rtl="0" eaLnBrk="1" latinLnBrk="0" hangingPunct="1">
+        <a:defRPr sz="1350" kern="1200">
           <a:solidFill>
             <a:schemeClr val="tx1"/>
           </a:solidFill>
@@ -3026,8 +3463,8 @@
           <a:cs typeface="+mn-cs"/>
         </a:defRPr>
       </a:lvl3pPr>
-      <a:lvl4pPr algn="l" defTabSz="342900" eaLnBrk="1" hangingPunct="1" latinLnBrk="0" marL="1028700" rtl="0">
-        <a:defRPr kern="1200" sz="1350">
+      <a:lvl4pPr marL="1028700" algn="l" defTabSz="342900" rtl="0" eaLnBrk="1" latinLnBrk="0" hangingPunct="1">
+        <a:defRPr sz="1350" kern="1200">
           <a:solidFill>
             <a:schemeClr val="tx1"/>
           </a:solidFill>
@@ -3036,8 +3473,8 @@
           <a:cs typeface="+mn-cs"/>
         </a:defRPr>
       </a:lvl4pPr>
-      <a:lvl5pPr algn="l" defTabSz="342900" eaLnBrk="1" hangingPunct="1" latinLnBrk="0" marL="1371600" rtl="0">
-        <a:defRPr kern="1200" sz="1350">
+      <a:lvl5pPr marL="1371600" algn="l" defTabSz="342900" rtl="0" eaLnBrk="1" latinLnBrk="0" hangingPunct="1">
+        <a:defRPr sz="1350" kern="1200">
           <a:solidFill>
             <a:schemeClr val="tx1"/>
           </a:solidFill>
@@ -3046,8 +3483,8 @@
           <a:cs typeface="+mn-cs"/>
         </a:defRPr>
       </a:lvl5pPr>
-      <a:lvl6pPr algn="l" defTabSz="342900" eaLnBrk="1" hangingPunct="1" latinLnBrk="0" marL="1714500" rtl="0">
-        <a:defRPr kern="1200" sz="1350">
+      <a:lvl6pPr marL="1714500" algn="l" defTabSz="342900" rtl="0" eaLnBrk="1" latinLnBrk="0" hangingPunct="1">
+        <a:defRPr sz="1350" kern="1200">
           <a:solidFill>
             <a:schemeClr val="tx1"/>
           </a:solidFill>
@@ -3056,8 +3493,8 @@
           <a:cs typeface="+mn-cs"/>
         </a:defRPr>
       </a:lvl6pPr>
-      <a:lvl7pPr algn="l" defTabSz="342900" eaLnBrk="1" hangingPunct="1" latinLnBrk="0" marL="2057400" rtl="0">
-        <a:defRPr kern="1200" sz="1350">
+      <a:lvl7pPr marL="2057400" algn="l" defTabSz="342900" rtl="0" eaLnBrk="1" latinLnBrk="0" hangingPunct="1">
+        <a:defRPr sz="1350" kern="1200">
           <a:solidFill>
             <a:schemeClr val="tx1"/>
           </a:solidFill>
@@ -3066,8 +3503,8 @@
           <a:cs typeface="+mn-cs"/>
         </a:defRPr>
       </a:lvl7pPr>
-      <a:lvl8pPr algn="l" defTabSz="342900" eaLnBrk="1" hangingPunct="1" latinLnBrk="0" marL="2400300" rtl="0">
-        <a:defRPr kern="1200" sz="1350">
+      <a:lvl8pPr marL="2400300" algn="l" defTabSz="342900" rtl="0" eaLnBrk="1" latinLnBrk="0" hangingPunct="1">
+        <a:defRPr sz="1350" kern="1200">
           <a:solidFill>
             <a:schemeClr val="tx1"/>
           </a:solidFill>
@@ -3076,8 +3513,8 @@
           <a:cs typeface="+mn-cs"/>
         </a:defRPr>
       </a:lvl8pPr>
-      <a:lvl9pPr algn="l" defTabSz="342900" eaLnBrk="1" hangingPunct="1" latinLnBrk="0" marL="2743200" rtl="0">
-        <a:defRPr kern="1200" sz="1350">
+      <a:lvl9pPr marL="2743200" algn="l" defTabSz="342900" rtl="0" eaLnBrk="1" latinLnBrk="0" hangingPunct="1">
+        <a:defRPr sz="1350" kern="1200">
           <a:solidFill>
             <a:schemeClr val="tx1"/>
           </a:solidFill>
@@ -3128,11 +3565,10 @@
           <a:bodyPr/>
           <a:lstStyle/>
           <a:p>
-            <a:pPr lvl="0" indent="0" marL="0">
+            <a:pPr marL="0" lvl="0" indent="0">
               <a:buNone/>
             </a:pPr>
             <a:r>
-              <a:rPr/>
               <a:t>1. Dependencies</a:t>
             </a:r>
           </a:p>
@@ -3140,6 +3576,9 @@
       </p:sp>
     </p:spTree>
   </p:cSld>
+  <p:clrMapOvr>
+    <a:masterClrMapping/>
+  </p:clrMapOvr>
 </p:sld>
 </file>
 
@@ -3181,12 +3620,48 @@
                 <a:tableStyleId>{5C22544A-7EE6-4342-B048-85BDC9FD1C3A}</a:tableStyleId>
               </a:tblPr>
               <a:tblGrid>
-                <a:gridCol w="1371600"/>
-                <a:gridCol w="1371600"/>
-                <a:gridCol w="1371600"/>
-                <a:gridCol w="1371600"/>
-                <a:gridCol w="1371600"/>
-                <a:gridCol w="1371600"/>
+                <a:gridCol w="1371600">
+                  <a:extLst>
+                    <a:ext uri="{9D8B030D-6E8A-4147-A177-3AD203B41FA5}">
+                      <a16:colId xmlns:a16="http://schemas.microsoft.com/office/drawing/2014/main" val="20000"/>
+                    </a:ext>
+                  </a:extLst>
+                </a:gridCol>
+                <a:gridCol w="1371600">
+                  <a:extLst>
+                    <a:ext uri="{9D8B030D-6E8A-4147-A177-3AD203B41FA5}">
+                      <a16:colId xmlns:a16="http://schemas.microsoft.com/office/drawing/2014/main" val="20001"/>
+                    </a:ext>
+                  </a:extLst>
+                </a:gridCol>
+                <a:gridCol w="1371600">
+                  <a:extLst>
+                    <a:ext uri="{9D8B030D-6E8A-4147-A177-3AD203B41FA5}">
+                      <a16:colId xmlns:a16="http://schemas.microsoft.com/office/drawing/2014/main" val="20002"/>
+                    </a:ext>
+                  </a:extLst>
+                </a:gridCol>
+                <a:gridCol w="1371600">
+                  <a:extLst>
+                    <a:ext uri="{9D8B030D-6E8A-4147-A177-3AD203B41FA5}">
+                      <a16:colId xmlns:a16="http://schemas.microsoft.com/office/drawing/2014/main" val="20003"/>
+                    </a:ext>
+                  </a:extLst>
+                </a:gridCol>
+                <a:gridCol w="1371600">
+                  <a:extLst>
+                    <a:ext uri="{9D8B030D-6E8A-4147-A177-3AD203B41FA5}">
+                      <a16:colId xmlns:a16="http://schemas.microsoft.com/office/drawing/2014/main" val="20004"/>
+                    </a:ext>
+                  </a:extLst>
+                </a:gridCol>
+                <a:gridCol w="1371600">
+                  <a:extLst>
+                    <a:ext uri="{9D8B030D-6E8A-4147-A177-3AD203B41FA5}">
+                      <a16:colId xmlns:a16="http://schemas.microsoft.com/office/drawing/2014/main" val="20005"/>
+                    </a:ext>
+                  </a:extLst>
+                </a:gridCol>
               </a:tblGrid>
               <a:tr h="0">
                 <a:tc>
@@ -3204,11 +3679,10 @@
                     <a:bodyPr/>
                     <a:lstStyle/>
                     <a:p>
-                      <a:pPr lvl="0" indent="0" marL="0">
-                        <a:buNone/>
-                      </a:pPr>
-                      <a:r>
-                        <a:rPr/>
+                      <a:pPr marL="0" lvl="0" indent="0">
+                        <a:buNone/>
+                      </a:pPr>
+                      <a:r>
                         <a:t>Sharpe</a:t>
                       </a:r>
                     </a:p>
@@ -3220,11 +3694,10 @@
                     <a:bodyPr/>
                     <a:lstStyle/>
                     <a:p>
-                      <a:pPr lvl="0" indent="0" marL="0">
-                        <a:buNone/>
-                      </a:pPr>
-                      <a:r>
-                        <a:rPr/>
+                      <a:pPr marL="0" lvl="0" indent="0">
+                        <a:buNone/>
+                      </a:pPr>
+                      <a:r>
                         <a:t>VaR 1%</a:t>
                       </a:r>
                     </a:p>
@@ -3236,11 +3709,10 @@
                     <a:bodyPr/>
                     <a:lstStyle/>
                     <a:p>
-                      <a:pPr lvl="0" indent="0" marL="0">
-                        <a:buNone/>
-                      </a:pPr>
-                      <a:r>
-                        <a:rPr/>
+                      <a:pPr marL="0" lvl="0" indent="0">
+                        <a:buNone/>
+                      </a:pPr>
+                      <a:r>
                         <a:t>Max Drawdown</a:t>
                       </a:r>
                     </a:p>
@@ -3252,11 +3724,10 @@
                     <a:bodyPr/>
                     <a:lstStyle/>
                     <a:p>
-                      <a:pPr lvl="0" indent="0" marL="0">
-                        <a:buNone/>
-                      </a:pPr>
-                      <a:r>
-                        <a:rPr/>
+                      <a:pPr marL="0" lvl="0" indent="0">
+                        <a:buNone/>
+                      </a:pPr>
+                      <a:r>
                         <a:t>Alpha</a:t>
                       </a:r>
                     </a:p>
@@ -3268,17 +3739,21 @@
                     <a:bodyPr/>
                     <a:lstStyle/>
                     <a:p>
-                      <a:pPr lvl="0" indent="0" marL="0">
-                        <a:buNone/>
-                      </a:pPr>
-                      <a:r>
-                        <a:rPr/>
+                      <a:pPr marL="0" lvl="0" indent="0">
+                        <a:buNone/>
+                      </a:pPr>
+                      <a:r>
                         <a:t>p-value(alpha)</a:t>
                       </a:r>
                     </a:p>
                   </a:txBody>
                   <a:tcPr/>
                 </a:tc>
+                <a:extLst>
+                  <a:ext uri="{0D108BD9-81ED-4DB2-BD59-A6C34878D82A}">
+                    <a16:rowId xmlns:a16="http://schemas.microsoft.com/office/drawing/2014/main" val="10000"/>
+                  </a:ext>
+                </a:extLst>
               </a:tr>
               <a:tr h="0">
                 <a:tc>
@@ -3286,91 +3761,96 @@
                     <a:bodyPr/>
                     <a:lstStyle/>
                     <a:p>
-                      <a:pPr lvl="0" indent="0" marL="0">
-                        <a:buNone/>
-                      </a:pPr>
-                      <a:r>
-                        <a:rPr/>
+                      <a:pPr marL="0" lvl="0" indent="0">
+                        <a:buNone/>
+                      </a:pPr>
+                      <a:r>
                         <a:t>Sample</a:t>
                       </a:r>
                     </a:p>
                   </a:txBody>
-                </a:tc>
-                <a:tc>
-                  <a:txBody>
-                    <a:bodyPr/>
-                    <a:lstStyle/>
-                    <a:p>
-                      <a:pPr lvl="0" indent="0" marL="0">
-                        <a:buNone/>
-                      </a:pPr>
-                      <a:r>
-                        <a:rPr/>
+                  <a:tcPr/>
+                </a:tc>
+                <a:tc>
+                  <a:txBody>
+                    <a:bodyPr/>
+                    <a:lstStyle/>
+                    <a:p>
+                      <a:pPr marL="0" lvl="0" indent="0">
+                        <a:buNone/>
+                      </a:pPr>
+                      <a:r>
                         <a:t>0.49</a:t>
                       </a:r>
                     </a:p>
                   </a:txBody>
-                </a:tc>
-                <a:tc>
-                  <a:txBody>
-                    <a:bodyPr/>
-                    <a:lstStyle/>
-                    <a:p>
-                      <a:pPr lvl="0" indent="0" marL="0">
-                        <a:buNone/>
-                      </a:pPr>
-                      <a:r>
-                        <a:rPr/>
+                  <a:tcPr/>
+                </a:tc>
+                <a:tc>
+                  <a:txBody>
+                    <a:bodyPr/>
+                    <a:lstStyle/>
+                    <a:p>
+                      <a:pPr marL="0" lvl="0" indent="0">
+                        <a:buNone/>
+                      </a:pPr>
+                      <a:r>
                         <a:t>-11.16%</a:t>
                       </a:r>
                     </a:p>
                   </a:txBody>
-                </a:tc>
-                <a:tc>
-                  <a:txBody>
-                    <a:bodyPr/>
-                    <a:lstStyle/>
-                    <a:p>
-                      <a:pPr lvl="0" indent="0" marL="0">
-                        <a:buNone/>
-                      </a:pPr>
-                      <a:r>
-                        <a:rPr/>
+                  <a:tcPr/>
+                </a:tc>
+                <a:tc>
+                  <a:txBody>
+                    <a:bodyPr/>
+                    <a:lstStyle/>
+                    <a:p>
+                      <a:pPr marL="0" lvl="0" indent="0">
+                        <a:buNone/>
+                      </a:pPr>
+                      <a:r>
                         <a:t>-28.14%</a:t>
                       </a:r>
                     </a:p>
                   </a:txBody>
-                </a:tc>
-                <a:tc>
-                  <a:txBody>
-                    <a:bodyPr/>
-                    <a:lstStyle/>
-                    <a:p>
-                      <a:pPr lvl="0" indent="0" marL="0">
-                        <a:buNone/>
-                      </a:pPr>
-                      <a:r>
-                        <a:rPr/>
+                  <a:tcPr/>
+                </a:tc>
+                <a:tc>
+                  <a:txBody>
+                    <a:bodyPr/>
+                    <a:lstStyle/>
+                    <a:p>
+                      <a:pPr marL="0" lvl="0" indent="0">
+                        <a:buNone/>
+                      </a:pPr>
+                      <a:r>
                         <a:t>0.39</a:t>
                       </a:r>
                     </a:p>
                   </a:txBody>
-                </a:tc>
-                <a:tc>
-                  <a:txBody>
-                    <a:bodyPr/>
-                    <a:lstStyle/>
-                    <a:p>
-                      <a:pPr lvl="0" indent="0" marL="0">
-                        <a:buNone/>
-                      </a:pPr>
-                      <a:r>
-                        <a:rPr/>
+                  <a:tcPr/>
+                </a:tc>
+                <a:tc>
+                  <a:txBody>
+                    <a:bodyPr/>
+                    <a:lstStyle/>
+                    <a:p>
+                      <a:pPr marL="0" lvl="0" indent="0">
+                        <a:buNone/>
+                      </a:pPr>
+                      <a:r>
                         <a:t>0.200</a:t>
                       </a:r>
                     </a:p>
                   </a:txBody>
-                </a:tc>
+                  <a:tcPr/>
+                </a:tc>
+                <a:extLst>
+                  <a:ext uri="{0D108BD9-81ED-4DB2-BD59-A6C34878D82A}">
+                    <a16:rowId xmlns:a16="http://schemas.microsoft.com/office/drawing/2014/main" val="10001"/>
+                  </a:ext>
+                </a:extLst>
               </a:tr>
               <a:tr h="0">
                 <a:tc>
@@ -3378,60 +3858,60 @@
                     <a:bodyPr/>
                     <a:lstStyle/>
                     <a:p>
-                      <a:pPr lvl="0" indent="0" marL="0">
-                        <a:buNone/>
-                      </a:pPr>
-                      <a:r>
-                        <a:rPr/>
+                      <a:pPr marL="0" lvl="0" indent="0">
+                        <a:buNone/>
+                      </a:pPr>
+                      <a:r>
                         <a:t>Market</a:t>
                       </a:r>
                     </a:p>
                   </a:txBody>
-                </a:tc>
-                <a:tc>
-                  <a:txBody>
-                    <a:bodyPr/>
-                    <a:lstStyle/>
-                    <a:p>
-                      <a:pPr lvl="0" indent="0" marL="0">
-                        <a:buNone/>
-                      </a:pPr>
-                      <a:r>
-                        <a:rPr/>
+                  <a:tcPr/>
+                </a:tc>
+                <a:tc>
+                  <a:txBody>
+                    <a:bodyPr/>
+                    <a:lstStyle/>
+                    <a:p>
+                      <a:pPr marL="0" lvl="0" indent="0">
+                        <a:buNone/>
+                      </a:pPr>
+                      <a:r>
                         <a:t>0.30</a:t>
                       </a:r>
                     </a:p>
                   </a:txBody>
-                </a:tc>
-                <a:tc>
-                  <a:txBody>
-                    <a:bodyPr/>
-                    <a:lstStyle/>
-                    <a:p>
-                      <a:pPr lvl="0" indent="0" marL="0">
-                        <a:buNone/>
-                      </a:pPr>
-                      <a:r>
-                        <a:rPr/>
+                  <a:tcPr/>
+                </a:tc>
+                <a:tc>
+                  <a:txBody>
+                    <a:bodyPr/>
+                    <a:lstStyle/>
+                    <a:p>
+                      <a:pPr marL="0" lvl="0" indent="0">
+                        <a:buNone/>
+                      </a:pPr>
+                      <a:r>
                         <a:t>-9.27%</a:t>
                       </a:r>
                     </a:p>
                   </a:txBody>
-                </a:tc>
-                <a:tc>
-                  <a:txBody>
-                    <a:bodyPr/>
-                    <a:lstStyle/>
-                    <a:p>
-                      <a:pPr lvl="0" indent="0" marL="0">
-                        <a:buNone/>
-                      </a:pPr>
-                      <a:r>
-                        <a:rPr/>
+                  <a:tcPr/>
+                </a:tc>
+                <a:tc>
+                  <a:txBody>
+                    <a:bodyPr/>
+                    <a:lstStyle/>
+                    <a:p>
+                      <a:pPr marL="0" lvl="0" indent="0">
+                        <a:buNone/>
+                      </a:pPr>
+                      <a:r>
                         <a:t>-29.34%</a:t>
                       </a:r>
                     </a:p>
                   </a:txBody>
+                  <a:tcPr/>
                 </a:tc>
                 <a:tc>
                   <a:txBody>
@@ -3441,6 +3921,7 @@
                       <a:endParaRPr/>
                     </a:p>
                   </a:txBody>
+                  <a:tcPr/>
                 </a:tc>
                 <a:tc>
                   <a:txBody>
@@ -3450,7 +3931,13 @@
                       <a:endParaRPr/>
                     </a:p>
                   </a:txBody>
-                </a:tc>
+                  <a:tcPr/>
+                </a:tc>
+                <a:extLst>
+                  <a:ext uri="{0D108BD9-81ED-4DB2-BD59-A6C34878D82A}">
+                    <a16:rowId xmlns:a16="http://schemas.microsoft.com/office/drawing/2014/main" val="10002"/>
+                  </a:ext>
+                </a:extLst>
               </a:tr>
               <a:tr h="0">
                 <a:tc>
@@ -3458,91 +3945,96 @@
                     <a:bodyPr/>
                     <a:lstStyle/>
                     <a:p>
-                      <a:pPr lvl="0" indent="0" marL="0">
-                        <a:buNone/>
-                      </a:pPr>
-                      <a:r>
-                        <a:rPr/>
+                      <a:pPr marL="0" lvl="0" indent="0">
+                        <a:buNone/>
+                      </a:pPr>
+                      <a:r>
                         <a:t>High esg_refinitive</a:t>
                       </a:r>
                     </a:p>
                   </a:txBody>
-                </a:tc>
-                <a:tc>
-                  <a:txBody>
-                    <a:bodyPr/>
-                    <a:lstStyle/>
-                    <a:p>
-                      <a:pPr lvl="0" indent="0" marL="0">
-                        <a:buNone/>
-                      </a:pPr>
-                      <a:r>
-                        <a:rPr/>
+                  <a:tcPr/>
+                </a:tc>
+                <a:tc>
+                  <a:txBody>
+                    <a:bodyPr/>
+                    <a:lstStyle/>
+                    <a:p>
+                      <a:pPr marL="0" lvl="0" indent="0">
+                        <a:buNone/>
+                      </a:pPr>
+                      <a:r>
                         <a:t>0.50</a:t>
                       </a:r>
                     </a:p>
                   </a:txBody>
-                </a:tc>
-                <a:tc>
-                  <a:txBody>
-                    <a:bodyPr/>
-                    <a:lstStyle/>
-                    <a:p>
-                      <a:pPr lvl="0" indent="0" marL="0">
-                        <a:buNone/>
-                      </a:pPr>
-                      <a:r>
-                        <a:rPr/>
+                  <a:tcPr/>
+                </a:tc>
+                <a:tc>
+                  <a:txBody>
+                    <a:bodyPr/>
+                    <a:lstStyle/>
+                    <a:p>
+                      <a:pPr marL="0" lvl="0" indent="0">
+                        <a:buNone/>
+                      </a:pPr>
+                      <a:r>
                         <a:t>-11.49%</a:t>
                       </a:r>
                     </a:p>
                   </a:txBody>
-                </a:tc>
-                <a:tc>
-                  <a:txBody>
-                    <a:bodyPr/>
-                    <a:lstStyle/>
-                    <a:p>
-                      <a:pPr lvl="0" indent="0" marL="0">
-                        <a:buNone/>
-                      </a:pPr>
-                      <a:r>
-                        <a:rPr/>
+                  <a:tcPr/>
+                </a:tc>
+                <a:tc>
+                  <a:txBody>
+                    <a:bodyPr/>
+                    <a:lstStyle/>
+                    <a:p>
+                      <a:pPr marL="0" lvl="0" indent="0">
+                        <a:buNone/>
+                      </a:pPr>
+                      <a:r>
                         <a:t>-29.94%</a:t>
                       </a:r>
                     </a:p>
                   </a:txBody>
-                </a:tc>
-                <a:tc>
-                  <a:txBody>
-                    <a:bodyPr/>
-                    <a:lstStyle/>
-                    <a:p>
-                      <a:pPr lvl="0" indent="0" marL="0">
-                        <a:buNone/>
-                      </a:pPr>
-                      <a:r>
-                        <a:rPr/>
+                  <a:tcPr/>
+                </a:tc>
+                <a:tc>
+                  <a:txBody>
+                    <a:bodyPr/>
+                    <a:lstStyle/>
+                    <a:p>
+                      <a:pPr marL="0" lvl="0" indent="0">
+                        <a:buNone/>
+                      </a:pPr>
+                      <a:r>
                         <a:t>0.42</a:t>
                       </a:r>
                     </a:p>
                   </a:txBody>
-                </a:tc>
-                <a:tc>
-                  <a:txBody>
-                    <a:bodyPr/>
-                    <a:lstStyle/>
-                    <a:p>
-                      <a:pPr lvl="0" indent="0" marL="0">
-                        <a:buNone/>
-                      </a:pPr>
-                      <a:r>
-                        <a:rPr/>
+                  <a:tcPr/>
+                </a:tc>
+                <a:tc>
+                  <a:txBody>
+                    <a:bodyPr/>
+                    <a:lstStyle/>
+                    <a:p>
+                      <a:pPr marL="0" lvl="0" indent="0">
+                        <a:buNone/>
+                      </a:pPr>
+                      <a:r>
                         <a:t>0.200</a:t>
                       </a:r>
                     </a:p>
                   </a:txBody>
-                </a:tc>
+                  <a:tcPr/>
+                </a:tc>
+                <a:extLst>
+                  <a:ext uri="{0D108BD9-81ED-4DB2-BD59-A6C34878D82A}">
+                    <a16:rowId xmlns:a16="http://schemas.microsoft.com/office/drawing/2014/main" val="10003"/>
+                  </a:ext>
+                </a:extLst>
               </a:tr>
               <a:tr h="0">
                 <a:tc>
@@ -3550,91 +4042,96 @@
                     <a:bodyPr/>
                     <a:lstStyle/>
                     <a:p>
-                      <a:pPr lvl="0" indent="0" marL="0">
-                        <a:buNone/>
-                      </a:pPr>
-                      <a:r>
-                        <a:rPr/>
+                      <a:pPr marL="0" lvl="0" indent="0">
+                        <a:buNone/>
+                      </a:pPr>
+                      <a:r>
                         <a:t>High transformation</a:t>
                       </a:r>
                     </a:p>
                   </a:txBody>
-                </a:tc>
-                <a:tc>
-                  <a:txBody>
-                    <a:bodyPr/>
-                    <a:lstStyle/>
-                    <a:p>
-                      <a:pPr lvl="0" indent="0" marL="0">
-                        <a:buNone/>
-                      </a:pPr>
-                      <a:r>
-                        <a:rPr/>
+                  <a:tcPr/>
+                </a:tc>
+                <a:tc>
+                  <a:txBody>
+                    <a:bodyPr/>
+                    <a:lstStyle/>
+                    <a:p>
+                      <a:pPr marL="0" lvl="0" indent="0">
+                        <a:buNone/>
+                      </a:pPr>
+                      <a:r>
                         <a:t>0.41</a:t>
                       </a:r>
                     </a:p>
                   </a:txBody>
-                </a:tc>
-                <a:tc>
-                  <a:txBody>
-                    <a:bodyPr/>
-                    <a:lstStyle/>
-                    <a:p>
-                      <a:pPr lvl="0" indent="0" marL="0">
-                        <a:buNone/>
-                      </a:pPr>
-                      <a:r>
-                        <a:rPr/>
+                  <a:tcPr/>
+                </a:tc>
+                <a:tc>
+                  <a:txBody>
+                    <a:bodyPr/>
+                    <a:lstStyle/>
+                    <a:p>
+                      <a:pPr marL="0" lvl="0" indent="0">
+                        <a:buNone/>
+                      </a:pPr>
+                      <a:r>
                         <a:t>-11.59%</a:t>
                       </a:r>
                     </a:p>
                   </a:txBody>
-                </a:tc>
-                <a:tc>
-                  <a:txBody>
-                    <a:bodyPr/>
-                    <a:lstStyle/>
-                    <a:p>
-                      <a:pPr lvl="0" indent="0" marL="0">
-                        <a:buNone/>
-                      </a:pPr>
-                      <a:r>
-                        <a:rPr/>
+                  <a:tcPr/>
+                </a:tc>
+                <a:tc>
+                  <a:txBody>
+                    <a:bodyPr/>
+                    <a:lstStyle/>
+                    <a:p>
+                      <a:pPr marL="0" lvl="0" indent="0">
+                        <a:buNone/>
+                      </a:pPr>
+                      <a:r>
                         <a:t>-32.30%</a:t>
                       </a:r>
                     </a:p>
                   </a:txBody>
-                </a:tc>
-                <a:tc>
-                  <a:txBody>
-                    <a:bodyPr/>
-                    <a:lstStyle/>
-                    <a:p>
-                      <a:pPr lvl="0" indent="0" marL="0">
-                        <a:buNone/>
-                      </a:pPr>
-                      <a:r>
-                        <a:rPr/>
+                  <a:tcPr/>
+                </a:tc>
+                <a:tc>
+                  <a:txBody>
+                    <a:bodyPr/>
+                    <a:lstStyle/>
+                    <a:p>
+                      <a:pPr marL="0" lvl="0" indent="0">
+                        <a:buNone/>
+                      </a:pPr>
+                      <a:r>
                         <a:t>0.26</a:t>
                       </a:r>
                     </a:p>
                   </a:txBody>
-                </a:tc>
-                <a:tc>
-                  <a:txBody>
-                    <a:bodyPr/>
-                    <a:lstStyle/>
-                    <a:p>
-                      <a:pPr lvl="0" indent="0" marL="0">
-                        <a:buNone/>
-                      </a:pPr>
-                      <a:r>
-                        <a:rPr/>
+                  <a:tcPr/>
+                </a:tc>
+                <a:tc>
+                  <a:txBody>
+                    <a:bodyPr/>
+                    <a:lstStyle/>
+                    <a:p>
+                      <a:pPr marL="0" lvl="0" indent="0">
+                        <a:buNone/>
+                      </a:pPr>
+                      <a:r>
                         <a:t>0.400</a:t>
                       </a:r>
                     </a:p>
                   </a:txBody>
-                </a:tc>
+                  <a:tcPr/>
+                </a:tc>
+                <a:extLst>
+                  <a:ext uri="{0D108BD9-81ED-4DB2-BD59-A6C34878D82A}">
+                    <a16:rowId xmlns:a16="http://schemas.microsoft.com/office/drawing/2014/main" val="10004"/>
+                  </a:ext>
+                </a:extLst>
               </a:tr>
               <a:tr h="0">
                 <a:tc>
@@ -3642,91 +4139,96 @@
                     <a:bodyPr/>
                     <a:lstStyle/>
                     <a:p>
-                      <a:pPr lvl="0" indent="0" marL="0">
-                        <a:buNone/>
-                      </a:pPr>
-                      <a:r>
-                        <a:rPr/>
+                      <a:pPr marL="0" lvl="0" indent="0">
+                        <a:buNone/>
+                      </a:pPr>
+                      <a:r>
                         <a:t>High preparation</a:t>
                       </a:r>
                     </a:p>
                   </a:txBody>
-                </a:tc>
-                <a:tc>
-                  <a:txBody>
-                    <a:bodyPr/>
-                    <a:lstStyle/>
-                    <a:p>
-                      <a:pPr lvl="0" indent="0" marL="0">
-                        <a:buNone/>
-                      </a:pPr>
-                      <a:r>
-                        <a:rPr/>
+                  <a:tcPr/>
+                </a:tc>
+                <a:tc>
+                  <a:txBody>
+                    <a:bodyPr/>
+                    <a:lstStyle/>
+                    <a:p>
+                      <a:pPr marL="0" lvl="0" indent="0">
+                        <a:buNone/>
+                      </a:pPr>
+                      <a:r>
                         <a:t>0.54</a:t>
                       </a:r>
                     </a:p>
                   </a:txBody>
-                </a:tc>
-                <a:tc>
-                  <a:txBody>
-                    <a:bodyPr/>
-                    <a:lstStyle/>
-                    <a:p>
-                      <a:pPr lvl="0" indent="0" marL="0">
-                        <a:buNone/>
-                      </a:pPr>
-                      <a:r>
-                        <a:rPr/>
+                  <a:tcPr/>
+                </a:tc>
+                <a:tc>
+                  <a:txBody>
+                    <a:bodyPr/>
+                    <a:lstStyle/>
+                    <a:p>
+                      <a:pPr marL="0" lvl="0" indent="0">
+                        <a:buNone/>
+                      </a:pPr>
+                      <a:r>
                         <a:t>-11.59%</a:t>
                       </a:r>
                     </a:p>
                   </a:txBody>
-                </a:tc>
-                <a:tc>
-                  <a:txBody>
-                    <a:bodyPr/>
-                    <a:lstStyle/>
-                    <a:p>
-                      <a:pPr lvl="0" indent="0" marL="0">
-                        <a:buNone/>
-                      </a:pPr>
-                      <a:r>
-                        <a:rPr/>
+                  <a:tcPr/>
+                </a:tc>
+                <a:tc>
+                  <a:txBody>
+                    <a:bodyPr/>
+                    <a:lstStyle/>
+                    <a:p>
+                      <a:pPr marL="0" lvl="0" indent="0">
+                        <a:buNone/>
+                      </a:pPr>
+                      <a:r>
                         <a:t>-27.34%</a:t>
                       </a:r>
                     </a:p>
                   </a:txBody>
-                </a:tc>
-                <a:tc>
-                  <a:txBody>
-                    <a:bodyPr/>
-                    <a:lstStyle/>
-                    <a:p>
-                      <a:pPr lvl="0" indent="0" marL="0">
-                        <a:buNone/>
-                      </a:pPr>
-                      <a:r>
-                        <a:rPr/>
+                  <a:tcPr/>
+                </a:tc>
+                <a:tc>
+                  <a:txBody>
+                    <a:bodyPr/>
+                    <a:lstStyle/>
+                    <a:p>
+                      <a:pPr marL="0" lvl="0" indent="0">
+                        <a:buNone/>
+                      </a:pPr>
+                      <a:r>
                         <a:t>0.49</a:t>
                       </a:r>
                     </a:p>
                   </a:txBody>
-                </a:tc>
-                <a:tc>
-                  <a:txBody>
-                    <a:bodyPr/>
-                    <a:lstStyle/>
-                    <a:p>
-                      <a:pPr lvl="0" indent="0" marL="0">
-                        <a:buNone/>
-                      </a:pPr>
-                      <a:r>
-                        <a:rPr/>
+                  <a:tcPr/>
+                </a:tc>
+                <a:tc>
+                  <a:txBody>
+                    <a:bodyPr/>
+                    <a:lstStyle/>
+                    <a:p>
+                      <a:pPr marL="0" lvl="0" indent="0">
+                        <a:buNone/>
+                      </a:pPr>
+                      <a:r>
                         <a:t>0.140</a:t>
                       </a:r>
                     </a:p>
                   </a:txBody>
-                </a:tc>
+                  <a:tcPr/>
+                </a:tc>
+                <a:extLst>
+                  <a:ext uri="{0D108BD9-81ED-4DB2-BD59-A6C34878D82A}">
+                    <a16:rowId xmlns:a16="http://schemas.microsoft.com/office/drawing/2014/main" val="10005"/>
+                  </a:ext>
+                </a:extLst>
               </a:tr>
             </a:tbl>
           </a:graphicData>
@@ -3734,6 +4236,9 @@
       </p:graphicFrame>
     </p:spTree>
   </p:cSld>
+  <p:clrMapOvr>
+    <a:masterClrMapping/>
+  </p:clrMapOvr>
 </p:sld>
 </file>
 
@@ -3756,7 +4261,7 @@
       </p:grpSpPr>
       <p:pic>
         <p:nvPicPr>
-          <p:cNvPr descr="Main_files/figure-pptx/cell-31-output-5.png" id="0" name="Picture 1"/>
+          <p:cNvPr id="2" name="Picture 1" descr="Main_files/figure-pptx/cell-31-output-5.png"/>
           <p:cNvPicPr>
             <a:picLocks noGrp="1" noChangeAspect="1"/>
           </p:cNvPicPr>
@@ -3786,6 +4291,9 @@
       </p:pic>
     </p:spTree>
   </p:cSld>
+  <p:clrMapOvr>
+    <a:masterClrMapping/>
+  </p:clrMapOvr>
 </p:sld>
 </file>
 
@@ -3808,7 +4316,7 @@
       </p:grpSpPr>
       <p:pic>
         <p:nvPicPr>
-          <p:cNvPr descr="Main_files/figure-pptx/cell-31-output-6.png" id="0" name="Picture 1"/>
+          <p:cNvPr id="2" name="Picture 1" descr="Main_files/figure-pptx/cell-31-output-6.png"/>
           <p:cNvPicPr>
             <a:picLocks noGrp="1" noChangeAspect="1"/>
           </p:cNvPicPr>
@@ -3838,6 +4346,9 @@
       </p:pic>
     </p:spTree>
   </p:cSld>
+  <p:clrMapOvr>
+    <a:masterClrMapping/>
+  </p:clrMapOvr>
 </p:sld>
 </file>
 
@@ -3878,11 +4389,10 @@
           <a:bodyPr/>
           <a:lstStyle/>
           <a:p>
-            <a:pPr lvl="0" indent="0" marL="0">
+            <a:pPr marL="0" lvl="0" indent="0">
               <a:buNone/>
             </a:pPr>
             <a:r>
-              <a:rPr/>
               <a:t>7. Portfolio Constituents</a:t>
             </a:r>
           </a:p>
@@ -3895,7 +4405,7 @@
             <a:spLocks noGrp="1"/>
           </p:cNvSpPr>
           <p:nvPr>
-            <p:ph idx="2" sz="half" type="body"/>
+            <p:ph type="body" sz="half" idx="2"/>
           </p:nvPr>
         </p:nvSpPr>
         <p:spPr/>
@@ -3903,7 +4413,7 @@
           <a:bodyPr/>
           <a:lstStyle/>
           <a:p>
-            <a:pPr lvl="0" indent="0" marL="0">
+            <a:pPr marL="0" lvl="0" indent="0">
               <a:spcBef>
                 <a:spcPts val="3000"/>
               </a:spcBef>
@@ -3925,11 +4435,10 @@
             </a:r>
           </a:p>
           <a:p>
-            <a:pPr lvl="0" indent="0" marL="0">
+            <a:pPr marL="0" lvl="0" indent="0">
               <a:buNone/>
             </a:pPr>
             <a:r>
-              <a:rPr/>
               <a:t>Uses </a:t>
             </a:r>
             <a:r>
@@ -3939,7 +4448,6 @@
               <a:t>signal_2_simple_quantiles_constituents</a:t>
             </a:r>
             <a:r>
-              <a:rPr/>
               <a:t> and </a:t>
             </a:r>
             <a:r>
@@ -3949,7 +4457,6 @@
               <a:t>global_universe</a:t>
             </a:r>
             <a:r>
-              <a:rPr/>
               <a:t> to inspect </a:t>
             </a:r>
             <a:r>
@@ -3957,7 +4464,6 @@
               <a:t>Industry</a:t>
             </a:r>
             <a:r>
-              <a:rPr/>
               <a:t>, </a:t>
             </a:r>
             <a:r>
@@ -3967,7 +4473,6 @@
               <a:t>loc</a:t>
             </a:r>
             <a:r>
-              <a:rPr/>
               <a:t>, and </a:t>
             </a:r>
             <a:r>
@@ -3975,7 +4480,6 @@
               <a:t>MacroRegion</a:t>
             </a:r>
             <a:r>
-              <a:rPr/>
               <a:t>: line charts of stock counts over time (default = last quantile </a:t>
             </a:r>
             <a:r>
@@ -3985,7 +4489,6 @@
               <a:t>p_k</a:t>
             </a:r>
             <a:r>
-              <a:rPr/>
               <a:t>, same as </a:t>
             </a:r>
             <a:r>
@@ -3995,7 +4498,6 @@
               <a:t>constituents[i][-1]</a:t>
             </a:r>
             <a:r>
-              <a:rPr/>
               <a:t>) and donut charts for the </a:t>
             </a:r>
             <a:r>
@@ -4003,7 +4505,6 @@
               <a:t>final</a:t>
             </a:r>
             <a:r>
-              <a:rPr/>
               <a:t> formation month. Optional: </a:t>
             </a:r>
             <a:r>
@@ -4013,7 +4514,6 @@
               <a:t>analyse_all_portfolios_at_once=True</a:t>
             </a:r>
             <a:r>
-              <a:rPr/>
               <a:t> unions all </a:t>
             </a:r>
             <a:r>
@@ -4023,7 +4523,6 @@
               <a:t>p_1</a:t>
             </a:r>
             <a:r>
-              <a:rPr/>
               <a:t>…</a:t>
             </a:r>
             <a:r>
@@ -4033,7 +4532,6 @@
               <a:t>p_k</a:t>
             </a:r>
             <a:r>
-              <a:rPr/>
               <a:t>; </a:t>
             </a:r>
             <a:r>
@@ -4043,16 +4541,14 @@
               <a:t>all_sub_portfolios=True</a:t>
             </a:r>
             <a:r>
-              <a:rPr/>
               <a:t> plots one subplot per quantile.</a:t>
             </a:r>
           </a:p>
           <a:p>
-            <a:pPr lvl="0" indent="0" marL="0">
+            <a:pPr marL="0" lvl="0" indent="0">
               <a:buNone/>
             </a:pPr>
             <a:r>
-              <a:rPr/>
               <a:t>The following only inspects the high transformation</a:t>
             </a:r>
           </a:p>
@@ -4060,7 +4556,7 @@
       </p:sp>
       <p:pic>
         <p:nvPicPr>
-          <p:cNvPr descr="Main_files/figure-pptx/cell-32-output-1.png" id="0" name="Picture 1"/>
+          <p:cNvPr id="3" name="Picture 1" descr="Main_files/figure-pptx/cell-32-output-1.png"/>
           <p:cNvPicPr>
             <a:picLocks noGrp="1" noChangeAspect="1"/>
           </p:cNvPicPr>
@@ -4090,6 +4586,9 @@
       </p:pic>
     </p:spTree>
   </p:cSld>
+  <p:clrMapOvr>
+    <a:masterClrMapping/>
+  </p:clrMapOvr>
 </p:sld>
 </file>
 
@@ -4112,7 +4611,7 @@
       </p:grpSpPr>
       <p:pic>
         <p:nvPicPr>
-          <p:cNvPr descr="Main_files/figure-pptx/cell-32-output-2.png" id="0" name="Picture 1"/>
+          <p:cNvPr id="2" name="Picture 1" descr="Main_files/figure-pptx/cell-32-output-2.png"/>
           <p:cNvPicPr>
             <a:picLocks noGrp="1" noChangeAspect="1"/>
           </p:cNvPicPr>
@@ -4142,6 +4641,9 @@
       </p:pic>
     </p:spTree>
   </p:cSld>
+  <p:clrMapOvr>
+    <a:masterClrMapping/>
+  </p:clrMapOvr>
 </p:sld>
 </file>
 
@@ -4164,7 +4666,7 @@
       </p:grpSpPr>
       <p:pic>
         <p:nvPicPr>
-          <p:cNvPr descr="Main_files/figure-pptx/cell-32-output-3.png" id="0" name="Picture 1"/>
+          <p:cNvPr id="2" name="Picture 1" descr="Main_files/figure-pptx/cell-32-output-3.png"/>
           <p:cNvPicPr>
             <a:picLocks noGrp="1" noChangeAspect="1"/>
           </p:cNvPicPr>
@@ -4194,6 +4696,9 @@
       </p:pic>
     </p:spTree>
   </p:cSld>
+  <p:clrMapOvr>
+    <a:masterClrMapping/>
+  </p:clrMapOvr>
 </p:sld>
 </file>
 
@@ -4216,7 +4721,7 @@
       </p:grpSpPr>
       <p:pic>
         <p:nvPicPr>
-          <p:cNvPr descr="Main_files/figure-pptx/cell-32-output-4.png" id="0" name="Picture 1"/>
+          <p:cNvPr id="2" name="Picture 1" descr="Main_files/figure-pptx/cell-32-output-4.png"/>
           <p:cNvPicPr>
             <a:picLocks noGrp="1" noChangeAspect="1"/>
           </p:cNvPicPr>
@@ -4246,6 +4751,9 @@
       </p:pic>
     </p:spTree>
   </p:cSld>
+  <p:clrMapOvr>
+    <a:masterClrMapping/>
+  </p:clrMapOvr>
 </p:sld>
 </file>
 
@@ -4268,7 +4776,7 @@
       </p:grpSpPr>
       <p:pic>
         <p:nvPicPr>
-          <p:cNvPr descr="Main_files/figure-pptx/cell-32-output-5.png" id="0" name="Picture 1"/>
+          <p:cNvPr id="2" name="Picture 1" descr="Main_files/figure-pptx/cell-32-output-5.png"/>
           <p:cNvPicPr>
             <a:picLocks noGrp="1" noChangeAspect="1"/>
           </p:cNvPicPr>
@@ -4298,6 +4806,9 @@
       </p:pic>
     </p:spTree>
   </p:cSld>
+  <p:clrMapOvr>
+    <a:masterClrMapping/>
+  </p:clrMapOvr>
 </p:sld>
 </file>
 
@@ -4320,7 +4831,7 @@
       </p:grpSpPr>
       <p:pic>
         <p:nvPicPr>
-          <p:cNvPr descr="Main_files/figure-pptx/cell-32-output-6.png" id="0" name="Picture 1"/>
+          <p:cNvPr id="2" name="Picture 1" descr="Main_files/figure-pptx/cell-32-output-6.png"/>
           <p:cNvPicPr>
             <a:picLocks noGrp="1" noChangeAspect="1"/>
           </p:cNvPicPr>
@@ -4350,6 +4861,9 @@
       </p:pic>
     </p:spTree>
   </p:cSld>
+  <p:clrMapOvr>
+    <a:masterClrMapping/>
+  </p:clrMapOvr>
 </p:sld>
 </file>
 
@@ -4372,7 +4886,7 @@
       </p:grpSpPr>
       <p:pic>
         <p:nvPicPr>
-          <p:cNvPr descr="Main_files/figure-pptx/cell-32-output-7.png" id="0" name="Picture 1"/>
+          <p:cNvPr id="2" name="Picture 1" descr="Main_files/figure-pptx/cell-32-output-7.png"/>
           <p:cNvPicPr>
             <a:picLocks noGrp="1" noChangeAspect="1"/>
           </p:cNvPicPr>
@@ -4402,6 +4916,9 @@
       </p:pic>
     </p:spTree>
   </p:cSld>
+  <p:clrMapOvr>
+    <a:masterClrMapping/>
+  </p:clrMapOvr>
 </p:sld>
 </file>
 
@@ -4437,11 +4954,10 @@
           <a:bodyPr/>
           <a:lstStyle/>
           <a:p>
-            <a:pPr lvl="0" indent="0" marL="0">
+            <a:pPr marL="0" lvl="0" indent="0">
               <a:buNone/>
             </a:pPr>
             <a:r>
-              <a:rPr/>
               <a:t>Filters</a:t>
             </a:r>
           </a:p>
@@ -4449,6 +4965,9 @@
       </p:sp>
     </p:spTree>
   </p:cSld>
+  <p:clrMapOvr>
+    <a:masterClrMapping/>
+  </p:clrMapOvr>
 </p:sld>
 </file>
 
@@ -4484,11 +5003,10 @@
           <a:bodyPr/>
           <a:lstStyle/>
           <a:p>
-            <a:pPr lvl="0" indent="0" marL="0">
+            <a:pPr marL="0" lvl="0" indent="0">
               <a:buNone/>
             </a:pPr>
             <a:r>
-              <a:rPr/>
               <a:t>1. Parameters</a:t>
             </a:r>
           </a:p>
@@ -4538,25 +5056,23 @@
             </a:r>
           </a:p>
           <a:p>
-            <a:pPr lvl="0" indent="0" marL="0">
+            <a:pPr marL="0" lvl="0" indent="0">
               <a:buNone/>
             </a:pPr>
             <a:r>
-              <a:rPr/>
               <a:t>Signal Design</a:t>
             </a:r>
           </a:p>
           <a:p>
-            <a:pPr lvl="0" indent="0" marL="0">
+            <a:pPr marL="0" lvl="0" indent="0">
               <a:buNone/>
             </a:pPr>
             <a:r>
-              <a:rPr/>
               <a:t>Signal Choice</a:t>
             </a:r>
           </a:p>
           <a:p>
-            <a:pPr lvl="0" indent="0" marL="0">
+            <a:pPr marL="0" lvl="0" indent="0">
               <a:spcBef>
                 <a:spcPts val="3000"/>
               </a:spcBef>
@@ -4568,16 +5084,15 @@
             </a:r>
           </a:p>
           <a:p>
-            <a:pPr lvl="0" indent="0" marL="0">
+            <a:pPr marL="0" lvl="0" indent="0">
               <a:buNone/>
             </a:pPr>
             <a:r>
-              <a:rPr/>
               <a:t>Golden Data</a:t>
             </a:r>
           </a:p>
           <a:p>
-            <a:pPr lvl="0" indent="0" marL="0">
+            <a:pPr marL="0" lvl="0" indent="0">
               <a:spcBef>
                 <a:spcPts val="3000"/>
               </a:spcBef>
@@ -4589,11 +5104,10 @@
             </a:r>
           </a:p>
           <a:p>
-            <a:pPr lvl="0" indent="0" marL="0">
+            <a:pPr marL="0" lvl="0" indent="0">
               <a:buNone/>
             </a:pPr>
             <a:r>
-              <a:rPr/>
               <a:t>clean below</a:t>
             </a:r>
           </a:p>
@@ -4636,20 +5150,18 @@
             </a:r>
           </a:p>
           <a:p>
-            <a:pPr lvl="0" indent="0" marL="0">
+            <a:pPr marL="0" lvl="0" indent="0">
               <a:buNone/>
             </a:pPr>
             <a:r>
-              <a:rPr/>
               <a:t>Create the signal</a:t>
             </a:r>
           </a:p>
           <a:p>
-            <a:pPr lvl="0" indent="0" marL="0">
+            <a:pPr marL="0" lvl="0" indent="0">
               <a:buNone/>
             </a:pPr>
             <a:r>
-              <a:rPr/>
               <a:t>Num stocks in USA and EU prior to some more filters</a:t>
             </a:r>
           </a:p>
@@ -4665,7 +5177,7 @@
             </a:r>
           </a:p>
           <a:p>
-            <a:pPr lvl="0" indent="0" marL="0">
+            <a:pPr marL="0" lvl="0" indent="0">
               <a:spcBef>
                 <a:spcPts val="3000"/>
               </a:spcBef>
@@ -4677,74 +5189,66 @@
             </a:r>
           </a:p>
           <a:p>
-            <a:pPr lvl="0" indent="0" marL="0">
+            <a:pPr marL="0" lvl="0" indent="0">
               <a:buNone/>
             </a:pPr>
             <a:r>
-              <a:rPr/>
               <a:t>Get and Process: 1- FX data</a:t>
             </a:r>
           </a:p>
           <a:p>
-            <a:pPr lvl="0" indent="0" marL="0">
+            <a:pPr marL="0" lvl="0" indent="0">
               <a:buNone/>
             </a:pPr>
             <a:r>
-              <a:rPr/>
               <a:t>2- USA Universe</a:t>
             </a:r>
           </a:p>
           <a:p>
-            <a:pPr lvl="0" indent="0" marL="0">
+            <a:pPr marL="0" lvl="0" indent="0">
               <a:buNone/>
             </a:pPr>
             <a:r>
-              <a:rPr/>
               <a:t>3- ROW Universe</a:t>
             </a:r>
           </a:p>
           <a:p>
-            <a:pPr lvl="0" indent="0" marL="0">
+            <a:pPr marL="0" lvl="0" indent="0">
               <a:buNone/>
             </a:pPr>
             <a:r>
-              <a:rPr/>
               <a:t>4 - Japan</a:t>
             </a:r>
           </a:p>
           <a:p>
-            <a:pPr lvl="0" indent="0" marL="0">
+            <a:pPr marL="0" lvl="0" indent="0">
               <a:buNone/>
             </a:pPr>
             <a:r>
-              <a:rPr/>
               <a:t>5 - ESG</a:t>
             </a:r>
           </a:p>
           <a:p>
-            <a:pPr lvl="0" indent="0" marL="0">
+            <a:pPr marL="0" lvl="0" indent="0">
               <a:buNone/>
             </a:pPr>
             <a:r>
-              <a:rPr/>
               <a:t>4- Fama-French</a:t>
             </a:r>
           </a:p>
           <a:p>
-            <a:pPr lvl="0" indent="0" marL="0">
+            <a:pPr marL="0" lvl="0" indent="0">
               <a:buNone/>
             </a:pPr>
             <a:r>
-              <a:rPr/>
               <a:t>5- Global Universe</a:t>
             </a:r>
           </a:p>
           <a:p>
-            <a:pPr lvl="0" indent="0" marL="0">
+            <a:pPr marL="0" lvl="0" indent="0">
               <a:buNone/>
             </a:pPr>
             <a:r>
-              <a:rPr/>
               <a:t>6- Accounting Data</a:t>
             </a:r>
           </a:p>
@@ -4761,7 +5265,7 @@
             </a:r>
           </a:p>
           <a:p>
-            <a:pPr lvl="0" indent="0" marL="0">
+            <a:pPr marL="0" lvl="0" indent="0">
               <a:spcBef>
                 <a:spcPts val="3000"/>
               </a:spcBef>
@@ -4773,16 +5277,15 @@
             </a:r>
           </a:p>
           <a:p>
-            <a:pPr lvl="0" indent="0" marL="0">
+            <a:pPr marL="0" lvl="0" indent="0">
               <a:buNone/>
             </a:pPr>
             <a:r>
-              <a:rPr/>
               <a:t>% Nan in accounting data</a:t>
             </a:r>
           </a:p>
           <a:p>
-            <a:pPr lvl="0" indent="0" marL="0">
+            <a:pPr marL="0" lvl="0" indent="0">
               <a:spcBef>
                 <a:spcPts val="3000"/>
               </a:spcBef>
@@ -4797,6 +5300,9 @@
       </p:sp>
     </p:spTree>
   </p:cSld>
+  <p:clrMapOvr>
+    <a:masterClrMapping/>
+  </p:clrMapOvr>
 </p:sld>
 </file>
 
@@ -4832,11 +5338,10 @@
           <a:bodyPr/>
           <a:lstStyle/>
           <a:p>
-            <a:pPr lvl="0" indent="0" marL="0">
+            <a:pPr marL="0" lvl="0" indent="0">
               <a:buNone/>
             </a:pPr>
             <a:r>
-              <a:rPr/>
               <a:t>4. Sector Split</a:t>
             </a:r>
           </a:p>
@@ -4857,29 +5362,26 @@
           <a:bodyPr/>
           <a:lstStyle/>
           <a:p>
-            <a:pPr lvl="0" indent="0" marL="0">
+            <a:pPr marL="0" lvl="0" indent="0">
               <a:buNone/>
             </a:pPr>
             <a:r>
-              <a:rPr/>
               <a:t>Add Market Portfolios</a:t>
             </a:r>
           </a:p>
           <a:p>
-            <a:pPr lvl="0" indent="0" marL="0">
+            <a:pPr marL="0" lvl="0" indent="0">
               <a:buNone/>
             </a:pPr>
             <a:r>
-              <a:rPr/>
               <a:t>Transform in excess returns using the risk free rate</a:t>
             </a:r>
           </a:p>
           <a:p>
-            <a:pPr lvl="0" indent="0" marL="0">
+            <a:pPr marL="0" lvl="0" indent="0">
               <a:buNone/>
             </a:pPr>
             <a:r>
-              <a:rPr/>
               <a:t>Make sure the first row is 0, so they all start at the same date</a:t>
             </a:r>
           </a:p>
@@ -4887,6 +5389,9 @@
       </p:sp>
     </p:spTree>
   </p:cSld>
+  <p:clrMapOvr>
+    <a:masterClrMapping/>
+  </p:clrMapOvr>
 </p:sld>
 </file>
 
@@ -4922,11 +5427,10 @@
           <a:bodyPr/>
           <a:lstStyle/>
           <a:p>
-            <a:pPr lvl="0" indent="0" marL="0">
+            <a:pPr marL="0" lvl="0" indent="0">
               <a:buNone/>
             </a:pPr>
             <a:r>
-              <a:rPr/>
               <a:t>5. Fama-French</a:t>
             </a:r>
           </a:p>
@@ -4953,16 +5457,76 @@
                 <a:tableStyleId>{5C22544A-7EE6-4342-B048-85BDC9FD1C3A}</a:tableStyleId>
               </a:tblPr>
               <a:tblGrid>
-                <a:gridCol w="812800"/>
-                <a:gridCol w="812800"/>
-                <a:gridCol w="812800"/>
-                <a:gridCol w="812800"/>
-                <a:gridCol w="812800"/>
-                <a:gridCol w="812800"/>
-                <a:gridCol w="812800"/>
-                <a:gridCol w="812800"/>
-                <a:gridCol w="812800"/>
-                <a:gridCol w="812800"/>
+                <a:gridCol w="812800">
+                  <a:extLst>
+                    <a:ext uri="{9D8B030D-6E8A-4147-A177-3AD203B41FA5}">
+                      <a16:colId xmlns:a16="http://schemas.microsoft.com/office/drawing/2014/main" val="20000"/>
+                    </a:ext>
+                  </a:extLst>
+                </a:gridCol>
+                <a:gridCol w="812800">
+                  <a:extLst>
+                    <a:ext uri="{9D8B030D-6E8A-4147-A177-3AD203B41FA5}">
+                      <a16:colId xmlns:a16="http://schemas.microsoft.com/office/drawing/2014/main" val="20001"/>
+                    </a:ext>
+                  </a:extLst>
+                </a:gridCol>
+                <a:gridCol w="812800">
+                  <a:extLst>
+                    <a:ext uri="{9D8B030D-6E8A-4147-A177-3AD203B41FA5}">
+                      <a16:colId xmlns:a16="http://schemas.microsoft.com/office/drawing/2014/main" val="20002"/>
+                    </a:ext>
+                  </a:extLst>
+                </a:gridCol>
+                <a:gridCol w="812800">
+                  <a:extLst>
+                    <a:ext uri="{9D8B030D-6E8A-4147-A177-3AD203B41FA5}">
+                      <a16:colId xmlns:a16="http://schemas.microsoft.com/office/drawing/2014/main" val="20003"/>
+                    </a:ext>
+                  </a:extLst>
+                </a:gridCol>
+                <a:gridCol w="812800">
+                  <a:extLst>
+                    <a:ext uri="{9D8B030D-6E8A-4147-A177-3AD203B41FA5}">
+                      <a16:colId xmlns:a16="http://schemas.microsoft.com/office/drawing/2014/main" val="20004"/>
+                    </a:ext>
+                  </a:extLst>
+                </a:gridCol>
+                <a:gridCol w="812800">
+                  <a:extLst>
+                    <a:ext uri="{9D8B030D-6E8A-4147-A177-3AD203B41FA5}">
+                      <a16:colId xmlns:a16="http://schemas.microsoft.com/office/drawing/2014/main" val="20005"/>
+                    </a:ext>
+                  </a:extLst>
+                </a:gridCol>
+                <a:gridCol w="812800">
+                  <a:extLst>
+                    <a:ext uri="{9D8B030D-6E8A-4147-A177-3AD203B41FA5}">
+                      <a16:colId xmlns:a16="http://schemas.microsoft.com/office/drawing/2014/main" val="20006"/>
+                    </a:ext>
+                  </a:extLst>
+                </a:gridCol>
+                <a:gridCol w="812800">
+                  <a:extLst>
+                    <a:ext uri="{9D8B030D-6E8A-4147-A177-3AD203B41FA5}">
+                      <a16:colId xmlns:a16="http://schemas.microsoft.com/office/drawing/2014/main" val="20007"/>
+                    </a:ext>
+                  </a:extLst>
+                </a:gridCol>
+                <a:gridCol w="812800">
+                  <a:extLst>
+                    <a:ext uri="{9D8B030D-6E8A-4147-A177-3AD203B41FA5}">
+                      <a16:colId xmlns:a16="http://schemas.microsoft.com/office/drawing/2014/main" val="20008"/>
+                    </a:ext>
+                  </a:extLst>
+                </a:gridCol>
+                <a:gridCol w="812800">
+                  <a:extLst>
+                    <a:ext uri="{9D8B030D-6E8A-4147-A177-3AD203B41FA5}">
+                      <a16:colId xmlns:a16="http://schemas.microsoft.com/office/drawing/2014/main" val="20009"/>
+                    </a:ext>
+                  </a:extLst>
+                </a:gridCol>
               </a:tblGrid>
               <a:tr h="0">
                 <a:tc>
@@ -4980,11 +5544,10 @@
                     <a:bodyPr/>
                     <a:lstStyle/>
                     <a:p>
-                      <a:pPr lvl="0" indent="0" marL="0">
-                        <a:buNone/>
-                      </a:pPr>
-                      <a:r>
-                        <a:rPr/>
+                      <a:pPr marL="0" lvl="0" indent="0">
+                        <a:buNone/>
+                      </a:pPr>
+                      <a:r>
                         <a:t>Low advocacy</a:t>
                       </a:r>
                     </a:p>
@@ -4996,11 +5559,10 @@
                     <a:bodyPr/>
                     <a:lstStyle/>
                     <a:p>
-                      <a:pPr lvl="0" indent="0" marL="0">
-                        <a:buNone/>
-                      </a:pPr>
-                      <a:r>
-                        <a:rPr/>
+                      <a:pPr marL="0" lvl="0" indent="0">
+                        <a:buNone/>
+                      </a:pPr>
+                      <a:r>
                         <a:t>High advocacy</a:t>
                       </a:r>
                     </a:p>
@@ -5012,11 +5574,10 @@
                     <a:bodyPr/>
                     <a:lstStyle/>
                     <a:p>
-                      <a:pPr lvl="0" indent="0" marL="0">
-                        <a:buNone/>
-                      </a:pPr>
-                      <a:r>
-                        <a:rPr/>
+                      <a:pPr marL="0" lvl="0" indent="0">
+                        <a:buNone/>
+                      </a:pPr>
+                      <a:r>
                         <a:t>Low preparation</a:t>
                       </a:r>
                     </a:p>
@@ -5028,11 +5589,10 @@
                     <a:bodyPr/>
                     <a:lstStyle/>
                     <a:p>
-                      <a:pPr lvl="0" indent="0" marL="0">
-                        <a:buNone/>
-                      </a:pPr>
-                      <a:r>
-                        <a:rPr/>
+                      <a:pPr marL="0" lvl="0" indent="0">
+                        <a:buNone/>
+                      </a:pPr>
+                      <a:r>
                         <a:t>High preparation</a:t>
                       </a:r>
                     </a:p>
@@ -5044,11 +5604,10 @@
                     <a:bodyPr/>
                     <a:lstStyle/>
                     <a:p>
-                      <a:pPr lvl="0" indent="0" marL="0">
-                        <a:buNone/>
-                      </a:pPr>
-                      <a:r>
-                        <a:rPr/>
+                      <a:pPr marL="0" lvl="0" indent="0">
+                        <a:buNone/>
+                      </a:pPr>
+                      <a:r>
                         <a:t>Low transformation</a:t>
                       </a:r>
                     </a:p>
@@ -5060,11 +5619,10 @@
                     <a:bodyPr/>
                     <a:lstStyle/>
                     <a:p>
-                      <a:pPr lvl="0" indent="0" marL="0">
-                        <a:buNone/>
-                      </a:pPr>
-                      <a:r>
-                        <a:rPr/>
+                      <a:pPr marL="0" lvl="0" indent="0">
+                        <a:buNone/>
+                      </a:pPr>
+                      <a:r>
                         <a:t>High transformation</a:t>
                       </a:r>
                     </a:p>
@@ -5076,11 +5634,10 @@
                     <a:bodyPr/>
                     <a:lstStyle/>
                     <a:p>
-                      <a:pPr lvl="0" indent="0" marL="0">
-                        <a:buNone/>
-                      </a:pPr>
-                      <a:r>
-                        <a:rPr/>
+                      <a:pPr marL="0" lvl="0" indent="0">
+                        <a:buNone/>
+                      </a:pPr>
+                      <a:r>
                         <a:t>Low esg_refinitive</a:t>
                       </a:r>
                     </a:p>
@@ -5092,11 +5649,10 @@
                     <a:bodyPr/>
                     <a:lstStyle/>
                     <a:p>
-                      <a:pPr lvl="0" indent="0" marL="0">
-                        <a:buNone/>
-                      </a:pPr>
-                      <a:r>
-                        <a:rPr/>
+                      <a:pPr marL="0" lvl="0" indent="0">
+                        <a:buNone/>
+                      </a:pPr>
+                      <a:r>
                         <a:t>High esg_refinitive</a:t>
                       </a:r>
                     </a:p>
@@ -5108,17 +5664,21 @@
                     <a:bodyPr/>
                     <a:lstStyle/>
                     <a:p>
-                      <a:pPr lvl="0" indent="0" marL="0">
-                        <a:buNone/>
-                      </a:pPr>
-                      <a:r>
-                        <a:rPr/>
+                      <a:pPr marL="0" lvl="0" indent="0">
+                        <a:buNone/>
+                      </a:pPr>
+                      <a:r>
                         <a:t>Sample</a:t>
                       </a:r>
                     </a:p>
                   </a:txBody>
                   <a:tcPr/>
                 </a:tc>
+                <a:extLst>
+                  <a:ext uri="{0D108BD9-81ED-4DB2-BD59-A6C34878D82A}">
+                    <a16:rowId xmlns:a16="http://schemas.microsoft.com/office/drawing/2014/main" val="10000"/>
+                  </a:ext>
+                </a:extLst>
               </a:tr>
               <a:tr h="0">
                 <a:tc>
@@ -5126,151 +5686,156 @@
                     <a:bodyPr/>
                     <a:lstStyle/>
                     <a:p>
-                      <a:pPr lvl="0" indent="0" marL="0">
-                        <a:buNone/>
-                      </a:pPr>
-                      <a:r>
-                        <a:rPr/>
+                      <a:pPr marL="0" lvl="0" indent="0">
+                        <a:buNone/>
+                      </a:pPr>
+                      <a:r>
                         <a:t>alpha</a:t>
                       </a:r>
                     </a:p>
                   </a:txBody>
-                </a:tc>
-                <a:tc>
-                  <a:txBody>
-                    <a:bodyPr/>
-                    <a:lstStyle/>
-                    <a:p>
-                      <a:pPr lvl="0" indent="0" marL="0">
-                        <a:buNone/>
-                      </a:pPr>
-                      <a:r>
-                        <a:rPr/>
+                  <a:tcPr/>
+                </a:tc>
+                <a:tc>
+                  <a:txBody>
+                    <a:bodyPr/>
+                    <a:lstStyle/>
+                    <a:p>
+                      <a:pPr marL="0" lvl="0" indent="0">
+                        <a:buNone/>
+                      </a:pPr>
+                      <a:r>
                         <a:t>0.33</a:t>
                       </a:r>
                     </a:p>
                   </a:txBody>
-                </a:tc>
-                <a:tc>
-                  <a:txBody>
-                    <a:bodyPr/>
-                    <a:lstStyle/>
-                    <a:p>
-                      <a:pPr lvl="0" indent="0" marL="0">
-                        <a:buNone/>
-                      </a:pPr>
-                      <a:r>
-                        <a:rPr/>
+                  <a:tcPr/>
+                </a:tc>
+                <a:tc>
+                  <a:txBody>
+                    <a:bodyPr/>
+                    <a:lstStyle/>
+                    <a:p>
+                      <a:pPr marL="0" lvl="0" indent="0">
+                        <a:buNone/>
+                      </a:pPr>
+                      <a:r>
                         <a:t>0.29</a:t>
                       </a:r>
                     </a:p>
                   </a:txBody>
-                </a:tc>
-                <a:tc>
-                  <a:txBody>
-                    <a:bodyPr/>
-                    <a:lstStyle/>
-                    <a:p>
-                      <a:pPr lvl="0" indent="0" marL="0">
-                        <a:buNone/>
-                      </a:pPr>
-                      <a:r>
-                        <a:rPr/>
+                  <a:tcPr/>
+                </a:tc>
+                <a:tc>
+                  <a:txBody>
+                    <a:bodyPr/>
+                    <a:lstStyle/>
+                    <a:p>
+                      <a:pPr marL="0" lvl="0" indent="0">
+                        <a:buNone/>
+                      </a:pPr>
+                      <a:r>
                         <a:t>0.23</a:t>
                       </a:r>
                     </a:p>
                   </a:txBody>
-                </a:tc>
-                <a:tc>
-                  <a:txBody>
-                    <a:bodyPr/>
-                    <a:lstStyle/>
-                    <a:p>
-                      <a:pPr lvl="0" indent="0" marL="0">
-                        <a:buNone/>
-                      </a:pPr>
-                      <a:r>
-                        <a:rPr/>
+                  <a:tcPr/>
+                </a:tc>
+                <a:tc>
+                  <a:txBody>
+                    <a:bodyPr/>
+                    <a:lstStyle/>
+                    <a:p>
+                      <a:pPr marL="0" lvl="0" indent="0">
+                        <a:buNone/>
+                      </a:pPr>
+                      <a:r>
                         <a:t>0.49</a:t>
                       </a:r>
                     </a:p>
                   </a:txBody>
-                </a:tc>
-                <a:tc>
-                  <a:txBody>
-                    <a:bodyPr/>
-                    <a:lstStyle/>
-                    <a:p>
-                      <a:pPr lvl="0" indent="0" marL="0">
-                        <a:buNone/>
-                      </a:pPr>
-                      <a:r>
-                        <a:rPr/>
+                  <a:tcPr/>
+                </a:tc>
+                <a:tc>
+                  <a:txBody>
+                    <a:bodyPr/>
+                    <a:lstStyle/>
+                    <a:p>
+                      <a:pPr marL="0" lvl="0" indent="0">
+                        <a:buNone/>
+                      </a:pPr>
+                      <a:r>
                         <a:t>0.45</a:t>
                       </a:r>
                     </a:p>
                   </a:txBody>
-                </a:tc>
-                <a:tc>
-                  <a:txBody>
-                    <a:bodyPr/>
-                    <a:lstStyle/>
-                    <a:p>
-                      <a:pPr lvl="0" indent="0" marL="0">
-                        <a:buNone/>
-                      </a:pPr>
-                      <a:r>
-                        <a:rPr/>
+                  <a:tcPr/>
+                </a:tc>
+                <a:tc>
+                  <a:txBody>
+                    <a:bodyPr/>
+                    <a:lstStyle/>
+                    <a:p>
+                      <a:pPr marL="0" lvl="0" indent="0">
+                        <a:buNone/>
+                      </a:pPr>
+                      <a:r>
                         <a:t>0.26</a:t>
                       </a:r>
                     </a:p>
                   </a:txBody>
-                </a:tc>
-                <a:tc>
-                  <a:txBody>
-                    <a:bodyPr/>
-                    <a:lstStyle/>
-                    <a:p>
-                      <a:pPr lvl="0" indent="0" marL="0">
-                        <a:buNone/>
-                      </a:pPr>
-                      <a:r>
-                        <a:rPr/>
+                  <a:tcPr/>
+                </a:tc>
+                <a:tc>
+                  <a:txBody>
+                    <a:bodyPr/>
+                    <a:lstStyle/>
+                    <a:p>
+                      <a:pPr marL="0" lvl="0" indent="0">
+                        <a:buNone/>
+                      </a:pPr>
+                      <a:r>
                         <a:t>0.24</a:t>
                       </a:r>
                     </a:p>
                   </a:txBody>
-                </a:tc>
-                <a:tc>
-                  <a:txBody>
-                    <a:bodyPr/>
-                    <a:lstStyle/>
-                    <a:p>
-                      <a:pPr lvl="0" indent="0" marL="0">
-                        <a:buNone/>
-                      </a:pPr>
-                      <a:r>
-                        <a:rPr/>
+                  <a:tcPr/>
+                </a:tc>
+                <a:tc>
+                  <a:txBody>
+                    <a:bodyPr/>
+                    <a:lstStyle/>
+                    <a:p>
+                      <a:pPr marL="0" lvl="0" indent="0">
+                        <a:buNone/>
+                      </a:pPr>
+                      <a:r>
                         <a:t>0.42</a:t>
                       </a:r>
                     </a:p>
                   </a:txBody>
-                </a:tc>
-                <a:tc>
-                  <a:txBody>
-                    <a:bodyPr/>
-                    <a:lstStyle/>
-                    <a:p>
-                      <a:pPr lvl="0" indent="0" marL="0">
-                        <a:buNone/>
-                      </a:pPr>
-                      <a:r>
-                        <a:rPr/>
+                  <a:tcPr/>
+                </a:tc>
+                <a:tc>
+                  <a:txBody>
+                    <a:bodyPr/>
+                    <a:lstStyle/>
+                    <a:p>
+                      <a:pPr marL="0" lvl="0" indent="0">
+                        <a:buNone/>
+                      </a:pPr>
+                      <a:r>
                         <a:t>0.39</a:t>
                       </a:r>
                     </a:p>
                   </a:txBody>
-                </a:tc>
+                  <a:tcPr/>
+                </a:tc>
+                <a:extLst>
+                  <a:ext uri="{0D108BD9-81ED-4DB2-BD59-A6C34878D82A}">
+                    <a16:rowId xmlns:a16="http://schemas.microsoft.com/office/drawing/2014/main" val="10001"/>
+                  </a:ext>
+                </a:extLst>
               </a:tr>
               <a:tr h="0">
                 <a:tc>
@@ -5278,151 +5843,156 @@
                     <a:bodyPr/>
                     <a:lstStyle/>
                     <a:p>
-                      <a:pPr lvl="0" indent="0" marL="0">
-                        <a:buNone/>
-                      </a:pPr>
-                      <a:r>
-                        <a:rPr/>
+                      <a:pPr marL="0" lvl="0" indent="0">
+                        <a:buNone/>
+                      </a:pPr>
+                      <a:r>
                         <a:t>beta_mkt</a:t>
                       </a:r>
                     </a:p>
                   </a:txBody>
-                </a:tc>
-                <a:tc>
-                  <a:txBody>
-                    <a:bodyPr/>
-                    <a:lstStyle/>
-                    <a:p>
-                      <a:pPr lvl="0" indent="0" marL="0">
-                        <a:buNone/>
-                      </a:pPr>
-                      <a:r>
-                        <a:rPr/>
+                  <a:tcPr/>
+                </a:tc>
+                <a:tc>
+                  <a:txBody>
+                    <a:bodyPr/>
+                    <a:lstStyle/>
+                    <a:p>
+                      <a:pPr marL="0" lvl="0" indent="0">
+                        <a:buNone/>
+                      </a:pPr>
+                      <a:r>
                         <a:t>1.06</a:t>
                       </a:r>
                     </a:p>
                   </a:txBody>
-                </a:tc>
-                <a:tc>
-                  <a:txBody>
-                    <a:bodyPr/>
-                    <a:lstStyle/>
-                    <a:p>
-                      <a:pPr lvl="0" indent="0" marL="0">
-                        <a:buNone/>
-                      </a:pPr>
-                      <a:r>
-                        <a:rPr/>
+                  <a:tcPr/>
+                </a:tc>
+                <a:tc>
+                  <a:txBody>
+                    <a:bodyPr/>
+                    <a:lstStyle/>
+                    <a:p>
+                      <a:pPr marL="0" lvl="0" indent="0">
+                        <a:buNone/>
+                      </a:pPr>
+                      <a:r>
                         <a:t>0.96</a:t>
                       </a:r>
                     </a:p>
                   </a:txBody>
-                </a:tc>
-                <a:tc>
-                  <a:txBody>
-                    <a:bodyPr/>
-                    <a:lstStyle/>
-                    <a:p>
-                      <a:pPr lvl="0" indent="0" marL="0">
-                        <a:buNone/>
-                      </a:pPr>
-                      <a:r>
-                        <a:rPr/>
+                  <a:tcPr/>
+                </a:tc>
+                <a:tc>
+                  <a:txBody>
+                    <a:bodyPr/>
+                    <a:lstStyle/>
+                    <a:p>
+                      <a:pPr marL="0" lvl="0" indent="0">
+                        <a:buNone/>
+                      </a:pPr>
+                      <a:r>
                         <a:t>0.95</a:t>
                       </a:r>
                     </a:p>
                   </a:txBody>
-                </a:tc>
-                <a:tc>
-                  <a:txBody>
-                    <a:bodyPr/>
-                    <a:lstStyle/>
-                    <a:p>
-                      <a:pPr lvl="0" indent="0" marL="0">
-                        <a:buNone/>
-                      </a:pPr>
-                      <a:r>
-                        <a:rPr/>
+                  <a:tcPr/>
+                </a:tc>
+                <a:tc>
+                  <a:txBody>
+                    <a:bodyPr/>
+                    <a:lstStyle/>
+                    <a:p>
+                      <a:pPr marL="0" lvl="0" indent="0">
+                        <a:buNone/>
+                      </a:pPr>
+                      <a:r>
                         <a:t>1.10</a:t>
                       </a:r>
                     </a:p>
                   </a:txBody>
-                </a:tc>
-                <a:tc>
-                  <a:txBody>
-                    <a:bodyPr/>
-                    <a:lstStyle/>
-                    <a:p>
-                      <a:pPr lvl="0" indent="0" marL="0">
-                        <a:buNone/>
-                      </a:pPr>
-                      <a:r>
-                        <a:rPr/>
+                  <a:tcPr/>
+                </a:tc>
+                <a:tc>
+                  <a:txBody>
+                    <a:bodyPr/>
+                    <a:lstStyle/>
+                    <a:p>
+                      <a:pPr marL="0" lvl="0" indent="0">
+                        <a:buNone/>
+                      </a:pPr>
+                      <a:r>
                         <a:t>1.02</a:t>
                       </a:r>
                     </a:p>
                   </a:txBody>
-                </a:tc>
-                <a:tc>
-                  <a:txBody>
-                    <a:bodyPr/>
-                    <a:lstStyle/>
-                    <a:p>
-                      <a:pPr lvl="0" indent="0" marL="0">
-                        <a:buNone/>
-                      </a:pPr>
-                      <a:r>
-                        <a:rPr/>
+                  <a:tcPr/>
+                </a:tc>
+                <a:tc>
+                  <a:txBody>
+                    <a:bodyPr/>
+                    <a:lstStyle/>
+                    <a:p>
+                      <a:pPr marL="0" lvl="0" indent="0">
+                        <a:buNone/>
+                      </a:pPr>
+                      <a:r>
                         <a:t>1.01</a:t>
                       </a:r>
                     </a:p>
                   </a:txBody>
-                </a:tc>
-                <a:tc>
-                  <a:txBody>
-                    <a:bodyPr/>
-                    <a:lstStyle/>
-                    <a:p>
-                      <a:pPr lvl="0" indent="0" marL="0">
-                        <a:buNone/>
-                      </a:pPr>
-                      <a:r>
-                        <a:rPr/>
+                  <a:tcPr/>
+                </a:tc>
+                <a:tc>
+                  <a:txBody>
+                    <a:bodyPr/>
+                    <a:lstStyle/>
+                    <a:p>
+                      <a:pPr marL="0" lvl="0" indent="0">
+                        <a:buNone/>
+                      </a:pPr>
+                      <a:r>
                         <a:t>0.85</a:t>
                       </a:r>
                     </a:p>
                   </a:txBody>
-                </a:tc>
-                <a:tc>
-                  <a:txBody>
-                    <a:bodyPr/>
-                    <a:lstStyle/>
-                    <a:p>
-                      <a:pPr lvl="0" indent="0" marL="0">
-                        <a:buNone/>
-                      </a:pPr>
-                      <a:r>
-                        <a:rPr/>
+                  <a:tcPr/>
+                </a:tc>
+                <a:tc>
+                  <a:txBody>
+                    <a:bodyPr/>
+                    <a:lstStyle/>
+                    <a:p>
+                      <a:pPr marL="0" lvl="0" indent="0">
+                        <a:buNone/>
+                      </a:pPr>
+                      <a:r>
                         <a:t>1.05</a:t>
                       </a:r>
                     </a:p>
                   </a:txBody>
-                </a:tc>
-                <a:tc>
-                  <a:txBody>
-                    <a:bodyPr/>
-                    <a:lstStyle/>
-                    <a:p>
-                      <a:pPr lvl="0" indent="0" marL="0">
-                        <a:buNone/>
-                      </a:pPr>
-                      <a:r>
-                        <a:rPr/>
+                  <a:tcPr/>
+                </a:tc>
+                <a:tc>
+                  <a:txBody>
+                    <a:bodyPr/>
+                    <a:lstStyle/>
+                    <a:p>
+                      <a:pPr marL="0" lvl="0" indent="0">
+                        <a:buNone/>
+                      </a:pPr>
+                      <a:r>
                         <a:t>1.00</a:t>
                       </a:r>
                     </a:p>
                   </a:txBody>
-                </a:tc>
+                  <a:tcPr/>
+                </a:tc>
+                <a:extLst>
+                  <a:ext uri="{0D108BD9-81ED-4DB2-BD59-A6C34878D82A}">
+                    <a16:rowId xmlns:a16="http://schemas.microsoft.com/office/drawing/2014/main" val="10002"/>
+                  </a:ext>
+                </a:extLst>
               </a:tr>
               <a:tr h="0">
                 <a:tc>
@@ -5430,151 +6000,156 @@
                     <a:bodyPr/>
                     <a:lstStyle/>
                     <a:p>
-                      <a:pPr lvl="0" indent="0" marL="0">
-                        <a:buNone/>
-                      </a:pPr>
-                      <a:r>
-                        <a:rPr/>
+                      <a:pPr marL="0" lvl="0" indent="0">
+                        <a:buNone/>
+                      </a:pPr>
+                      <a:r>
                         <a:t>beta_smb</a:t>
                       </a:r>
                     </a:p>
                   </a:txBody>
-                </a:tc>
-                <a:tc>
-                  <a:txBody>
-                    <a:bodyPr/>
-                    <a:lstStyle/>
-                    <a:p>
-                      <a:pPr lvl="0" indent="0" marL="0">
-                        <a:buNone/>
-                      </a:pPr>
-                      <a:r>
-                        <a:rPr/>
+                  <a:tcPr/>
+                </a:tc>
+                <a:tc>
+                  <a:txBody>
+                    <a:bodyPr/>
+                    <a:lstStyle/>
+                    <a:p>
+                      <a:pPr marL="0" lvl="0" indent="0">
+                        <a:buNone/>
+                      </a:pPr>
+                      <a:r>
                         <a:t>-0.18</a:t>
                       </a:r>
                     </a:p>
                   </a:txBody>
-                </a:tc>
-                <a:tc>
-                  <a:txBody>
-                    <a:bodyPr/>
-                    <a:lstStyle/>
-                    <a:p>
-                      <a:pPr lvl="0" indent="0" marL="0">
-                        <a:buNone/>
-                      </a:pPr>
-                      <a:r>
-                        <a:rPr/>
+                  <a:tcPr/>
+                </a:tc>
+                <a:tc>
+                  <a:txBody>
+                    <a:bodyPr/>
+                    <a:lstStyle/>
+                    <a:p>
+                      <a:pPr marL="0" lvl="0" indent="0">
+                        <a:buNone/>
+                      </a:pPr>
+                      <a:r>
                         <a:t>-0.04</a:t>
                       </a:r>
                     </a:p>
                   </a:txBody>
-                </a:tc>
-                <a:tc>
-                  <a:txBody>
-                    <a:bodyPr/>
-                    <a:lstStyle/>
-                    <a:p>
-                      <a:pPr lvl="0" indent="0" marL="0">
-                        <a:buNone/>
-                      </a:pPr>
-                      <a:r>
-                        <a:rPr/>
+                  <a:tcPr/>
+                </a:tc>
+                <a:tc>
+                  <a:txBody>
+                    <a:bodyPr/>
+                    <a:lstStyle/>
+                    <a:p>
+                      <a:pPr marL="0" lvl="0" indent="0">
+                        <a:buNone/>
+                      </a:pPr>
+                      <a:r>
                         <a:t>-0.07</a:t>
                       </a:r>
                     </a:p>
                   </a:txBody>
-                </a:tc>
-                <a:tc>
-                  <a:txBody>
-                    <a:bodyPr/>
-                    <a:lstStyle/>
-                    <a:p>
-                      <a:pPr lvl="0" indent="0" marL="0">
-                        <a:buNone/>
-                      </a:pPr>
-                      <a:r>
-                        <a:rPr/>
+                  <a:tcPr/>
+                </a:tc>
+                <a:tc>
+                  <a:txBody>
+                    <a:bodyPr/>
+                    <a:lstStyle/>
+                    <a:p>
+                      <a:pPr marL="0" lvl="0" indent="0">
+                        <a:buNone/>
+                      </a:pPr>
+                      <a:r>
                         <a:t>-0.15</a:t>
                       </a:r>
                     </a:p>
                   </a:txBody>
-                </a:tc>
-                <a:tc>
-                  <a:txBody>
-                    <a:bodyPr/>
-                    <a:lstStyle/>
-                    <a:p>
-                      <a:pPr lvl="0" indent="0" marL="0">
-                        <a:buNone/>
-                      </a:pPr>
-                      <a:r>
-                        <a:rPr/>
+                  <a:tcPr/>
+                </a:tc>
+                <a:tc>
+                  <a:txBody>
+                    <a:bodyPr/>
+                    <a:lstStyle/>
+                    <a:p>
+                      <a:pPr marL="0" lvl="0" indent="0">
+                        <a:buNone/>
+                      </a:pPr>
+                      <a:r>
                         <a:t>-0.06</a:t>
                       </a:r>
                     </a:p>
                   </a:txBody>
-                </a:tc>
-                <a:tc>
-                  <a:txBody>
-                    <a:bodyPr/>
-                    <a:lstStyle/>
-                    <a:p>
-                      <a:pPr lvl="0" indent="0" marL="0">
-                        <a:buNone/>
-                      </a:pPr>
-                      <a:r>
-                        <a:rPr/>
+                  <a:tcPr/>
+                </a:tc>
+                <a:tc>
+                  <a:txBody>
+                    <a:bodyPr/>
+                    <a:lstStyle/>
+                    <a:p>
+                      <a:pPr marL="0" lvl="0" indent="0">
+                        <a:buNone/>
+                      </a:pPr>
+                      <a:r>
                         <a:t>-0.08</a:t>
                       </a:r>
                     </a:p>
                   </a:txBody>
-                </a:tc>
-                <a:tc>
-                  <a:txBody>
-                    <a:bodyPr/>
-                    <a:lstStyle/>
-                    <a:p>
-                      <a:pPr lvl="0" indent="0" marL="0">
-                        <a:buNone/>
-                      </a:pPr>
-                      <a:r>
-                        <a:rPr/>
+                  <a:tcPr/>
+                </a:tc>
+                <a:tc>
+                  <a:txBody>
+                    <a:bodyPr/>
+                    <a:lstStyle/>
+                    <a:p>
+                      <a:pPr marL="0" lvl="0" indent="0">
+                        <a:buNone/>
+                      </a:pPr>
+                      <a:r>
                         <a:t>0.04</a:t>
                       </a:r>
                     </a:p>
                   </a:txBody>
-                </a:tc>
-                <a:tc>
-                  <a:txBody>
-                    <a:bodyPr/>
-                    <a:lstStyle/>
-                    <a:p>
-                      <a:pPr lvl="0" indent="0" marL="0">
-                        <a:buNone/>
-                      </a:pPr>
-                      <a:r>
-                        <a:rPr/>
+                  <a:tcPr/>
+                </a:tc>
+                <a:tc>
+                  <a:txBody>
+                    <a:bodyPr/>
+                    <a:lstStyle/>
+                    <a:p>
+                      <a:pPr marL="0" lvl="0" indent="0">
+                        <a:buNone/>
+                      </a:pPr>
+                      <a:r>
                         <a:t>-0.26</a:t>
                       </a:r>
                     </a:p>
                   </a:txBody>
-                </a:tc>
-                <a:tc>
-                  <a:txBody>
-                    <a:bodyPr/>
-                    <a:lstStyle/>
-                    <a:p>
-                      <a:pPr lvl="0" indent="0" marL="0">
-                        <a:buNone/>
-                      </a:pPr>
-                      <a:r>
-                        <a:rPr/>
+                  <a:tcPr/>
+                </a:tc>
+                <a:tc>
+                  <a:txBody>
+                    <a:bodyPr/>
+                    <a:lstStyle/>
+                    <a:p>
+                      <a:pPr marL="0" lvl="0" indent="0">
+                        <a:buNone/>
+                      </a:pPr>
+                      <a:r>
                         <a:t>-0.12</a:t>
                       </a:r>
                     </a:p>
                   </a:txBody>
-                </a:tc>
+                  <a:tcPr/>
+                </a:tc>
+                <a:extLst>
+                  <a:ext uri="{0D108BD9-81ED-4DB2-BD59-A6C34878D82A}">
+                    <a16:rowId xmlns:a16="http://schemas.microsoft.com/office/drawing/2014/main" val="10003"/>
+                  </a:ext>
+                </a:extLst>
               </a:tr>
               <a:tr h="0">
                 <a:tc>
@@ -5582,151 +6157,156 @@
                     <a:bodyPr/>
                     <a:lstStyle/>
                     <a:p>
-                      <a:pPr lvl="0" indent="0" marL="0">
-                        <a:buNone/>
-                      </a:pPr>
-                      <a:r>
-                        <a:rPr/>
+                      <a:pPr marL="0" lvl="0" indent="0">
+                        <a:buNone/>
+                      </a:pPr>
+                      <a:r>
                         <a:t>beta_hml</a:t>
                       </a:r>
                     </a:p>
                   </a:txBody>
-                </a:tc>
-                <a:tc>
-                  <a:txBody>
-                    <a:bodyPr/>
-                    <a:lstStyle/>
-                    <a:p>
-                      <a:pPr lvl="0" indent="0" marL="0">
-                        <a:buNone/>
-                      </a:pPr>
-                      <a:r>
-                        <a:rPr/>
+                  <a:tcPr/>
+                </a:tc>
+                <a:tc>
+                  <a:txBody>
+                    <a:bodyPr/>
+                    <a:lstStyle/>
+                    <a:p>
+                      <a:pPr marL="0" lvl="0" indent="0">
+                        <a:buNone/>
+                      </a:pPr>
+                      <a:r>
                         <a:t>0.35</a:t>
                       </a:r>
                     </a:p>
                   </a:txBody>
-                </a:tc>
-                <a:tc>
-                  <a:txBody>
-                    <a:bodyPr/>
-                    <a:lstStyle/>
-                    <a:p>
-                      <a:pPr lvl="0" indent="0" marL="0">
-                        <a:buNone/>
-                      </a:pPr>
-                      <a:r>
-                        <a:rPr/>
+                  <a:tcPr/>
+                </a:tc>
+                <a:tc>
+                  <a:txBody>
+                    <a:bodyPr/>
+                    <a:lstStyle/>
+                    <a:p>
+                      <a:pPr marL="0" lvl="0" indent="0">
+                        <a:buNone/>
+                      </a:pPr>
+                      <a:r>
                         <a:t>0.32</a:t>
                       </a:r>
                     </a:p>
                   </a:txBody>
-                </a:tc>
-                <a:tc>
-                  <a:txBody>
-                    <a:bodyPr/>
-                    <a:lstStyle/>
-                    <a:p>
-                      <a:pPr lvl="0" indent="0" marL="0">
-                        <a:buNone/>
-                      </a:pPr>
-                      <a:r>
-                        <a:rPr/>
+                  <a:tcPr/>
+                </a:tc>
+                <a:tc>
+                  <a:txBody>
+                    <a:bodyPr/>
+                    <a:lstStyle/>
+                    <a:p>
+                      <a:pPr marL="0" lvl="0" indent="0">
+                        <a:buNone/>
+                      </a:pPr>
+                      <a:r>
                         <a:t>0.31</a:t>
                       </a:r>
                     </a:p>
                   </a:txBody>
-                </a:tc>
-                <a:tc>
-                  <a:txBody>
-                    <a:bodyPr/>
-                    <a:lstStyle/>
-                    <a:p>
-                      <a:pPr lvl="0" indent="0" marL="0">
-                        <a:buNone/>
-                      </a:pPr>
-                      <a:r>
-                        <a:rPr/>
+                  <a:tcPr/>
+                </a:tc>
+                <a:tc>
+                  <a:txBody>
+                    <a:bodyPr/>
+                    <a:lstStyle/>
+                    <a:p>
+                      <a:pPr marL="0" lvl="0" indent="0">
+                        <a:buNone/>
+                      </a:pPr>
+                      <a:r>
                         <a:t>0.40</a:t>
                       </a:r>
                     </a:p>
                   </a:txBody>
-                </a:tc>
-                <a:tc>
-                  <a:txBody>
-                    <a:bodyPr/>
-                    <a:lstStyle/>
-                    <a:p>
-                      <a:pPr lvl="0" indent="0" marL="0">
-                        <a:buNone/>
-                      </a:pPr>
-                      <a:r>
-                        <a:rPr/>
+                  <a:tcPr/>
+                </a:tc>
+                <a:tc>
+                  <a:txBody>
+                    <a:bodyPr/>
+                    <a:lstStyle/>
+                    <a:p>
+                      <a:pPr marL="0" lvl="0" indent="0">
+                        <a:buNone/>
+                      </a:pPr>
+                      <a:r>
                         <a:t>0.38</a:t>
                       </a:r>
                     </a:p>
                   </a:txBody>
-                </a:tc>
-                <a:tc>
-                  <a:txBody>
-                    <a:bodyPr/>
-                    <a:lstStyle/>
-                    <a:p>
-                      <a:pPr lvl="0" indent="0" marL="0">
-                        <a:buNone/>
-                      </a:pPr>
-                      <a:r>
-                        <a:rPr/>
+                  <a:tcPr/>
+                </a:tc>
+                <a:tc>
+                  <a:txBody>
+                    <a:bodyPr/>
+                    <a:lstStyle/>
+                    <a:p>
+                      <a:pPr marL="0" lvl="0" indent="0">
+                        <a:buNone/>
+                      </a:pPr>
+                      <a:r>
                         <a:t>0.33</a:t>
                       </a:r>
                     </a:p>
                   </a:txBody>
-                </a:tc>
-                <a:tc>
-                  <a:txBody>
-                    <a:bodyPr/>
-                    <a:lstStyle/>
-                    <a:p>
-                      <a:pPr lvl="0" indent="0" marL="0">
-                        <a:buNone/>
-                      </a:pPr>
-                      <a:r>
-                        <a:rPr/>
+                  <a:tcPr/>
+                </a:tc>
+                <a:tc>
+                  <a:txBody>
+                    <a:bodyPr/>
+                    <a:lstStyle/>
+                    <a:p>
+                      <a:pPr marL="0" lvl="0" indent="0">
+                        <a:buNone/>
+                      </a:pPr>
+                      <a:r>
                         <a:t>0.33</a:t>
                       </a:r>
                     </a:p>
                   </a:txBody>
-                </a:tc>
-                <a:tc>
-                  <a:txBody>
-                    <a:bodyPr/>
-                    <a:lstStyle/>
-                    <a:p>
-                      <a:pPr lvl="0" indent="0" marL="0">
-                        <a:buNone/>
-                      </a:pPr>
-                      <a:r>
-                        <a:rPr/>
+                  <a:tcPr/>
+                </a:tc>
+                <a:tc>
+                  <a:txBody>
+                    <a:bodyPr/>
+                    <a:lstStyle/>
+                    <a:p>
+                      <a:pPr marL="0" lvl="0" indent="0">
+                        <a:buNone/>
+                      </a:pPr>
+                      <a:r>
                         <a:t>0.35</a:t>
                       </a:r>
                     </a:p>
                   </a:txBody>
-                </a:tc>
-                <a:tc>
-                  <a:txBody>
-                    <a:bodyPr/>
-                    <a:lstStyle/>
-                    <a:p>
-                      <a:pPr lvl="0" indent="0" marL="0">
-                        <a:buNone/>
-                      </a:pPr>
-                      <a:r>
-                        <a:rPr/>
+                  <a:tcPr/>
+                </a:tc>
+                <a:tc>
+                  <a:txBody>
+                    <a:bodyPr/>
+                    <a:lstStyle/>
+                    <a:p>
+                      <a:pPr marL="0" lvl="0" indent="0">
+                        <a:buNone/>
+                      </a:pPr>
+                      <a:r>
                         <a:t>0.34</a:t>
                       </a:r>
                     </a:p>
                   </a:txBody>
-                </a:tc>
+                  <a:tcPr/>
+                </a:tc>
+                <a:extLst>
+                  <a:ext uri="{0D108BD9-81ED-4DB2-BD59-A6C34878D82A}">
+                    <a16:rowId xmlns:a16="http://schemas.microsoft.com/office/drawing/2014/main" val="10004"/>
+                  </a:ext>
+                </a:extLst>
               </a:tr>
               <a:tr h="0">
                 <a:tc>
@@ -5734,151 +6314,156 @@
                     <a:bodyPr/>
                     <a:lstStyle/>
                     <a:p>
-                      <a:pPr lvl="0" indent="0" marL="0">
-                        <a:buNone/>
-                      </a:pPr>
-                      <a:r>
-                        <a:rPr/>
+                      <a:pPr marL="0" lvl="0" indent="0">
+                        <a:buNone/>
+                      </a:pPr>
+                      <a:r>
                         <a:t>p-value(alpha)</a:t>
                       </a:r>
                     </a:p>
                   </a:txBody>
-                </a:tc>
-                <a:tc>
-                  <a:txBody>
-                    <a:bodyPr/>
-                    <a:lstStyle/>
-                    <a:p>
-                      <a:pPr lvl="0" indent="0" marL="0">
-                        <a:buNone/>
-                      </a:pPr>
-                      <a:r>
-                        <a:rPr/>
+                  <a:tcPr/>
+                </a:tc>
+                <a:tc>
+                  <a:txBody>
+                    <a:bodyPr/>
+                    <a:lstStyle/>
+                    <a:p>
+                      <a:pPr marL="0" lvl="0" indent="0">
+                        <a:buNone/>
+                      </a:pPr>
+                      <a:r>
                         <a:t>0.31</a:t>
                       </a:r>
                     </a:p>
                   </a:txBody>
-                </a:tc>
-                <a:tc>
-                  <a:txBody>
-                    <a:bodyPr/>
-                    <a:lstStyle/>
-                    <a:p>
-                      <a:pPr lvl="0" indent="0" marL="0">
-                        <a:buNone/>
-                      </a:pPr>
-                      <a:r>
-                        <a:rPr/>
+                  <a:tcPr/>
+                </a:tc>
+                <a:tc>
+                  <a:txBody>
+                    <a:bodyPr/>
+                    <a:lstStyle/>
+                    <a:p>
+                      <a:pPr marL="0" lvl="0" indent="0">
+                        <a:buNone/>
+                      </a:pPr>
+                      <a:r>
                         <a:t>0.33</a:t>
                       </a:r>
                     </a:p>
                   </a:txBody>
-                </a:tc>
-                <a:tc>
-                  <a:txBody>
-                    <a:bodyPr/>
-                    <a:lstStyle/>
-                    <a:p>
-                      <a:pPr lvl="0" indent="0" marL="0">
-                        <a:buNone/>
-                      </a:pPr>
-                      <a:r>
-                        <a:rPr/>
+                  <a:tcPr/>
+                </a:tc>
+                <a:tc>
+                  <a:txBody>
+                    <a:bodyPr/>
+                    <a:lstStyle/>
+                    <a:p>
+                      <a:pPr marL="0" lvl="0" indent="0">
+                        <a:buNone/>
+                      </a:pPr>
+                      <a:r>
                         <a:t>0.46</a:t>
                       </a:r>
                     </a:p>
                   </a:txBody>
-                </a:tc>
-                <a:tc>
-                  <a:txBody>
-                    <a:bodyPr/>
-                    <a:lstStyle/>
-                    <a:p>
-                      <a:pPr lvl="0" indent="0" marL="0">
-                        <a:buNone/>
-                      </a:pPr>
-                      <a:r>
-                        <a:rPr/>
+                  <a:tcPr/>
+                </a:tc>
+                <a:tc>
+                  <a:txBody>
+                    <a:bodyPr/>
+                    <a:lstStyle/>
+                    <a:p>
+                      <a:pPr marL="0" lvl="0" indent="0">
+                        <a:buNone/>
+                      </a:pPr>
+                      <a:r>
                         <a:t>0.14</a:t>
                       </a:r>
                     </a:p>
                   </a:txBody>
-                </a:tc>
-                <a:tc>
-                  <a:txBody>
-                    <a:bodyPr/>
-                    <a:lstStyle/>
-                    <a:p>
-                      <a:pPr lvl="0" indent="0" marL="0">
-                        <a:buNone/>
-                      </a:pPr>
-                      <a:r>
-                        <a:rPr/>
+                  <a:tcPr/>
+                </a:tc>
+                <a:tc>
+                  <a:txBody>
+                    <a:bodyPr/>
+                    <a:lstStyle/>
+                    <a:p>
+                      <a:pPr marL="0" lvl="0" indent="0">
+                        <a:buNone/>
+                      </a:pPr>
+                      <a:r>
                         <a:t>0.15</a:t>
                       </a:r>
                     </a:p>
                   </a:txBody>
-                </a:tc>
-                <a:tc>
-                  <a:txBody>
-                    <a:bodyPr/>
-                    <a:lstStyle/>
-                    <a:p>
-                      <a:pPr lvl="0" indent="0" marL="0">
-                        <a:buNone/>
-                      </a:pPr>
-                      <a:r>
-                        <a:rPr/>
+                  <a:tcPr/>
+                </a:tc>
+                <a:tc>
+                  <a:txBody>
+                    <a:bodyPr/>
+                    <a:lstStyle/>
+                    <a:p>
+                      <a:pPr marL="0" lvl="0" indent="0">
+                        <a:buNone/>
+                      </a:pPr>
+                      <a:r>
                         <a:t>0.40</a:t>
                       </a:r>
                     </a:p>
                   </a:txBody>
-                </a:tc>
-                <a:tc>
-                  <a:txBody>
-                    <a:bodyPr/>
-                    <a:lstStyle/>
-                    <a:p>
-                      <a:pPr lvl="0" indent="0" marL="0">
-                        <a:buNone/>
-                      </a:pPr>
-                      <a:r>
-                        <a:rPr/>
+                  <a:tcPr/>
+                </a:tc>
+                <a:tc>
+                  <a:txBody>
+                    <a:bodyPr/>
+                    <a:lstStyle/>
+                    <a:p>
+                      <a:pPr marL="0" lvl="0" indent="0">
+                        <a:buNone/>
+                      </a:pPr>
+                      <a:r>
                         <a:t>0.45</a:t>
                       </a:r>
                     </a:p>
                   </a:txBody>
-                </a:tc>
-                <a:tc>
-                  <a:txBody>
-                    <a:bodyPr/>
-                    <a:lstStyle/>
-                    <a:p>
-                      <a:pPr lvl="0" indent="0" marL="0">
-                        <a:buNone/>
-                      </a:pPr>
-                      <a:r>
-                        <a:rPr/>
+                  <a:tcPr/>
+                </a:tc>
+                <a:tc>
+                  <a:txBody>
+                    <a:bodyPr/>
+                    <a:lstStyle/>
+                    <a:p>
+                      <a:pPr marL="0" lvl="0" indent="0">
+                        <a:buNone/>
+                      </a:pPr>
+                      <a:r>
                         <a:t>0.20</a:t>
                       </a:r>
                     </a:p>
                   </a:txBody>
-                </a:tc>
-                <a:tc>
-                  <a:txBody>
-                    <a:bodyPr/>
-                    <a:lstStyle/>
-                    <a:p>
-                      <a:pPr lvl="0" indent="0" marL="0">
-                        <a:buNone/>
-                      </a:pPr>
-                      <a:r>
-                        <a:rPr/>
+                  <a:tcPr/>
+                </a:tc>
+                <a:tc>
+                  <a:txBody>
+                    <a:bodyPr/>
+                    <a:lstStyle/>
+                    <a:p>
+                      <a:pPr marL="0" lvl="0" indent="0">
+                        <a:buNone/>
+                      </a:pPr>
+                      <a:r>
                         <a:t>0.20</a:t>
                       </a:r>
                     </a:p>
                   </a:txBody>
-                </a:tc>
+                  <a:tcPr/>
+                </a:tc>
+                <a:extLst>
+                  <a:ext uri="{0D108BD9-81ED-4DB2-BD59-A6C34878D82A}">
+                    <a16:rowId xmlns:a16="http://schemas.microsoft.com/office/drawing/2014/main" val="10005"/>
+                  </a:ext>
+                </a:extLst>
               </a:tr>
             </a:tbl>
           </a:graphicData>
@@ -5886,6 +6471,9 @@
       </p:graphicFrame>
     </p:spTree>
   </p:cSld>
+  <p:clrMapOvr>
+    <a:masterClrMapping/>
+  </p:clrMapOvr>
 </p:sld>
 </file>
 
@@ -5921,11 +6509,10 @@
           <a:bodyPr/>
           <a:lstStyle/>
           <a:p>
-            <a:pPr lvl="0" indent="0" marL="0">
+            <a:pPr marL="0" lvl="0" indent="0">
               <a:buNone/>
             </a:pPr>
             <a:r>
-              <a:rPr/>
               <a:t>6. Performance Metrics</a:t>
             </a:r>
           </a:p>
@@ -5933,6 +6520,9 @@
       </p:sp>
     </p:spTree>
   </p:cSld>
+  <p:clrMapOvr>
+    <a:masterClrMapping/>
+  </p:clrMapOvr>
 </p:sld>
 </file>
 
@@ -5968,11 +6558,10 @@
           <a:bodyPr/>
           <a:lstStyle/>
           <a:p>
-            <a:pPr lvl="0" indent="0" marL="0">
+            <a:pPr marL="0" lvl="0" indent="0">
               <a:buNone/>
             </a:pPr>
             <a:r>
-              <a:rPr/>
               <a:t>Cumulative Returns Plot</a:t>
             </a:r>
           </a:p>
@@ -5980,22 +6569,22 @@
       </p:sp>
       <p:pic>
         <p:nvPicPr>
-          <p:cNvPr descr="Main_files/figure-pptx/cell-31-output-1.png" id="0" name="Picture 1"/>
+          <p:cNvPr id="3" name="Picture 1" descr="Main_files/figure-pptx/cell-31-output-1.png"/>
           <p:cNvPicPr>
             <a:picLocks noGrp="1" noChangeAspect="1"/>
           </p:cNvPicPr>
           <p:nvPr/>
         </p:nvPicPr>
         <p:blipFill>
-          <a:blip r:embed="rId2"/>
+          <a:blip r:embed="rId3"/>
           <a:stretch>
             <a:fillRect/>
           </a:stretch>
         </p:blipFill>
         <p:spPr bwMode="auto">
           <a:xfrm>
-            <a:off x="457200" y="1397000"/>
-            <a:ext cx="8229600" cy="2997200"/>
+            <a:off x="145986" y="1246909"/>
+            <a:ext cx="8764618" cy="3192052"/>
           </a:xfrm>
           <a:prstGeom prst="rect">
             <a:avLst/>
@@ -6010,6 +6599,9 @@
       </p:pic>
     </p:spTree>
   </p:cSld>
+  <p:clrMapOvr>
+    <a:masterClrMapping/>
+  </p:clrMapOvr>
 </p:sld>
 </file>
 
@@ -6032,7 +6624,7 @@
       </p:grpSpPr>
       <p:pic>
         <p:nvPicPr>
-          <p:cNvPr descr="Main_files/figure-pptx/cell-31-output-2.png" id="0" name="Picture 1"/>
+          <p:cNvPr id="2" name="Picture 1" descr="Main_files/figure-pptx/cell-31-output-2.png"/>
           <p:cNvPicPr>
             <a:picLocks noGrp="1" noChangeAspect="1"/>
           </p:cNvPicPr>
@@ -6062,6 +6654,9 @@
       </p:pic>
     </p:spTree>
   </p:cSld>
+  <p:clrMapOvr>
+    <a:masterClrMapping/>
+  </p:clrMapOvr>
 </p:sld>
 </file>
 
@@ -6103,15 +6698,69 @@
                 <a:tableStyleId>{5C22544A-7EE6-4342-B048-85BDC9FD1C3A}</a:tableStyleId>
               </a:tblPr>
               <a:tblGrid>
-                <a:gridCol w="914400"/>
-                <a:gridCol w="914400"/>
-                <a:gridCol w="914400"/>
-                <a:gridCol w="914400"/>
-                <a:gridCol w="914400"/>
-                <a:gridCol w="914400"/>
-                <a:gridCol w="914400"/>
-                <a:gridCol w="914400"/>
-                <a:gridCol w="914400"/>
+                <a:gridCol w="914400">
+                  <a:extLst>
+                    <a:ext uri="{9D8B030D-6E8A-4147-A177-3AD203B41FA5}">
+                      <a16:colId xmlns:a16="http://schemas.microsoft.com/office/drawing/2014/main" val="20000"/>
+                    </a:ext>
+                  </a:extLst>
+                </a:gridCol>
+                <a:gridCol w="914400">
+                  <a:extLst>
+                    <a:ext uri="{9D8B030D-6E8A-4147-A177-3AD203B41FA5}">
+                      <a16:colId xmlns:a16="http://schemas.microsoft.com/office/drawing/2014/main" val="20001"/>
+                    </a:ext>
+                  </a:extLst>
+                </a:gridCol>
+                <a:gridCol w="914400">
+                  <a:extLst>
+                    <a:ext uri="{9D8B030D-6E8A-4147-A177-3AD203B41FA5}">
+                      <a16:colId xmlns:a16="http://schemas.microsoft.com/office/drawing/2014/main" val="20002"/>
+                    </a:ext>
+                  </a:extLst>
+                </a:gridCol>
+                <a:gridCol w="914400">
+                  <a:extLst>
+                    <a:ext uri="{9D8B030D-6E8A-4147-A177-3AD203B41FA5}">
+                      <a16:colId xmlns:a16="http://schemas.microsoft.com/office/drawing/2014/main" val="20003"/>
+                    </a:ext>
+                  </a:extLst>
+                </a:gridCol>
+                <a:gridCol w="914400">
+                  <a:extLst>
+                    <a:ext uri="{9D8B030D-6E8A-4147-A177-3AD203B41FA5}">
+                      <a16:colId xmlns:a16="http://schemas.microsoft.com/office/drawing/2014/main" val="20004"/>
+                    </a:ext>
+                  </a:extLst>
+                </a:gridCol>
+                <a:gridCol w="914400">
+                  <a:extLst>
+                    <a:ext uri="{9D8B030D-6E8A-4147-A177-3AD203B41FA5}">
+                      <a16:colId xmlns:a16="http://schemas.microsoft.com/office/drawing/2014/main" val="20005"/>
+                    </a:ext>
+                  </a:extLst>
+                </a:gridCol>
+                <a:gridCol w="914400">
+                  <a:extLst>
+                    <a:ext uri="{9D8B030D-6E8A-4147-A177-3AD203B41FA5}">
+                      <a16:colId xmlns:a16="http://schemas.microsoft.com/office/drawing/2014/main" val="20006"/>
+                    </a:ext>
+                  </a:extLst>
+                </a:gridCol>
+                <a:gridCol w="914400">
+                  <a:extLst>
+                    <a:ext uri="{9D8B030D-6E8A-4147-A177-3AD203B41FA5}">
+                      <a16:colId xmlns:a16="http://schemas.microsoft.com/office/drawing/2014/main" val="20007"/>
+                    </a:ext>
+                  </a:extLst>
+                </a:gridCol>
+                <a:gridCol w="914400">
+                  <a:extLst>
+                    <a:ext uri="{9D8B030D-6E8A-4147-A177-3AD203B41FA5}">
+                      <a16:colId xmlns:a16="http://schemas.microsoft.com/office/drawing/2014/main" val="20008"/>
+                    </a:ext>
+                  </a:extLst>
+                </a:gridCol>
               </a:tblGrid>
               <a:tr h="0">
                 <a:tc>
@@ -6129,11 +6778,10 @@
                     <a:bodyPr/>
                     <a:lstStyle/>
                     <a:p>
-                      <a:pPr lvl="0" indent="0" marL="0">
-                        <a:buNone/>
-                      </a:pPr>
-                      <a:r>
-                        <a:rPr/>
+                      <a:pPr marL="0" lvl="0" indent="0">
+                        <a:buNone/>
+                      </a:pPr>
+                      <a:r>
                         <a:t>1m</a:t>
                       </a:r>
                     </a:p>
@@ -6145,11 +6793,10 @@
                     <a:bodyPr/>
                     <a:lstStyle/>
                     <a:p>
-                      <a:pPr lvl="0" indent="0" marL="0">
-                        <a:buNone/>
-                      </a:pPr>
-                      <a:r>
-                        <a:rPr/>
+                      <a:pPr marL="0" lvl="0" indent="0">
+                        <a:buNone/>
+                      </a:pPr>
+                      <a:r>
                         <a:t>3m</a:t>
                       </a:r>
                     </a:p>
@@ -6161,11 +6808,10 @@
                     <a:bodyPr/>
                     <a:lstStyle/>
                     <a:p>
-                      <a:pPr lvl="0" indent="0" marL="0">
-                        <a:buNone/>
-                      </a:pPr>
-                      <a:r>
-                        <a:rPr/>
+                      <a:pPr marL="0" lvl="0" indent="0">
+                        <a:buNone/>
+                      </a:pPr>
+                      <a:r>
                         <a:t>YTD</a:t>
                       </a:r>
                     </a:p>
@@ -6177,11 +6823,10 @@
                     <a:bodyPr/>
                     <a:lstStyle/>
                     <a:p>
-                      <a:pPr lvl="0" indent="0" marL="0">
-                        <a:buNone/>
-                      </a:pPr>
-                      <a:r>
-                        <a:rPr/>
+                      <a:pPr marL="0" lvl="0" indent="0">
+                        <a:buNone/>
+                      </a:pPr>
+                      <a:r>
                         <a:t>1yr</a:t>
                       </a:r>
                     </a:p>
@@ -6193,11 +6838,10 @@
                     <a:bodyPr/>
                     <a:lstStyle/>
                     <a:p>
-                      <a:pPr lvl="0" indent="0" marL="0">
-                        <a:buNone/>
-                      </a:pPr>
-                      <a:r>
-                        <a:rPr/>
+                      <a:pPr marL="0" lvl="0" indent="0">
+                        <a:buNone/>
+                      </a:pPr>
+                      <a:r>
                         <a:t>3yr</a:t>
                       </a:r>
                     </a:p>
@@ -6209,11 +6853,10 @@
                     <a:bodyPr/>
                     <a:lstStyle/>
                     <a:p>
-                      <a:pPr lvl="0" indent="0" marL="0">
-                        <a:buNone/>
-                      </a:pPr>
-                      <a:r>
-                        <a:rPr/>
+                      <a:pPr marL="0" lvl="0" indent="0">
+                        <a:buNone/>
+                      </a:pPr>
+                      <a:r>
                         <a:t>5yr</a:t>
                       </a:r>
                     </a:p>
@@ -6225,11 +6868,10 @@
                     <a:bodyPr/>
                     <a:lstStyle/>
                     <a:p>
-                      <a:pPr lvl="0" indent="0" marL="0">
-                        <a:buNone/>
-                      </a:pPr>
-                      <a:r>
-                        <a:rPr/>
+                      <a:pPr marL="0" lvl="0" indent="0">
+                        <a:buNone/>
+                      </a:pPr>
+                      <a:r>
                         <a:t>10yr</a:t>
                       </a:r>
                     </a:p>
@@ -6241,17 +6883,21 @@
                     <a:bodyPr/>
                     <a:lstStyle/>
                     <a:p>
-                      <a:pPr lvl="0" indent="0" marL="0">
-                        <a:buNone/>
-                      </a:pPr>
-                      <a:r>
-                        <a:rPr/>
+                      <a:pPr marL="0" lvl="0" indent="0">
+                        <a:buNone/>
+                      </a:pPr>
+                      <a:r>
                         <a:t>Since launch</a:t>
                       </a:r>
                     </a:p>
                   </a:txBody>
                   <a:tcPr/>
                 </a:tc>
+                <a:extLst>
+                  <a:ext uri="{0D108BD9-81ED-4DB2-BD59-A6C34878D82A}">
+                    <a16:rowId xmlns:a16="http://schemas.microsoft.com/office/drawing/2014/main" val="10000"/>
+                  </a:ext>
+                </a:extLst>
               </a:tr>
               <a:tr h="0">
                 <a:tc>
@@ -6259,136 +6905,141 @@
                     <a:bodyPr/>
                     <a:lstStyle/>
                     <a:p>
-                      <a:pPr lvl="0" indent="0" marL="0">
-                        <a:buNone/>
-                      </a:pPr>
-                      <a:r>
-                        <a:rPr/>
+                      <a:pPr marL="0" lvl="0" indent="0">
+                        <a:buNone/>
+                      </a:pPr>
+                      <a:r>
                         <a:t>Sample</a:t>
                       </a:r>
                     </a:p>
                   </a:txBody>
-                </a:tc>
-                <a:tc>
-                  <a:txBody>
-                    <a:bodyPr/>
-                    <a:lstStyle/>
-                    <a:p>
-                      <a:pPr lvl="0" indent="0" marL="0">
-                        <a:buNone/>
-                      </a:pPr>
-                      <a:r>
-                        <a:rPr/>
+                  <a:tcPr/>
+                </a:tc>
+                <a:tc>
+                  <a:txBody>
+                    <a:bodyPr/>
+                    <a:lstStyle/>
+                    <a:p>
+                      <a:pPr marL="0" lvl="0" indent="0">
+                        <a:buNone/>
+                      </a:pPr>
+                      <a:r>
                         <a:t>-3.82%</a:t>
                       </a:r>
                     </a:p>
                   </a:txBody>
-                </a:tc>
-                <a:tc>
-                  <a:txBody>
-                    <a:bodyPr/>
-                    <a:lstStyle/>
-                    <a:p>
-                      <a:pPr lvl="0" indent="0" marL="0">
-                        <a:buNone/>
-                      </a:pPr>
-                      <a:r>
-                        <a:rPr/>
+                  <a:tcPr/>
+                </a:tc>
+                <a:tc>
+                  <a:txBody>
+                    <a:bodyPr/>
+                    <a:lstStyle/>
+                    <a:p>
+                      <a:pPr marL="0" lvl="0" indent="0">
+                        <a:buNone/>
+                      </a:pPr>
+                      <a:r>
                         <a:t>1.58%</a:t>
                       </a:r>
                     </a:p>
                   </a:txBody>
-                </a:tc>
-                <a:tc>
-                  <a:txBody>
-                    <a:bodyPr/>
-                    <a:lstStyle/>
-                    <a:p>
-                      <a:pPr lvl="0" indent="0" marL="0">
-                        <a:buNone/>
-                      </a:pPr>
-                      <a:r>
-                        <a:rPr/>
+                  <a:tcPr/>
+                </a:tc>
+                <a:tc>
+                  <a:txBody>
+                    <a:bodyPr/>
+                    <a:lstStyle/>
+                    <a:p>
+                      <a:pPr marL="0" lvl="0" indent="0">
+                        <a:buNone/>
+                      </a:pPr>
+                      <a:r>
                         <a:t>0.87%</a:t>
                       </a:r>
                     </a:p>
                   </a:txBody>
-                </a:tc>
-                <a:tc>
-                  <a:txBody>
-                    <a:bodyPr/>
-                    <a:lstStyle/>
-                    <a:p>
-                      <a:pPr lvl="0" indent="0" marL="0">
-                        <a:buNone/>
-                      </a:pPr>
-                      <a:r>
-                        <a:rPr/>
+                  <a:tcPr/>
+                </a:tc>
+                <a:tc>
+                  <a:txBody>
+                    <a:bodyPr/>
+                    <a:lstStyle/>
+                    <a:p>
+                      <a:pPr marL="0" lvl="0" indent="0">
+                        <a:buNone/>
+                      </a:pPr>
+                      <a:r>
                         <a:t>0.87%</a:t>
                       </a:r>
                     </a:p>
                   </a:txBody>
-                </a:tc>
-                <a:tc>
-                  <a:txBody>
-                    <a:bodyPr/>
-                    <a:lstStyle/>
-                    <a:p>
-                      <a:pPr lvl="0" indent="0" marL="0">
-                        <a:buNone/>
-                      </a:pPr>
-                      <a:r>
-                        <a:rPr/>
+                  <a:tcPr/>
+                </a:tc>
+                <a:tc>
+                  <a:txBody>
+                    <a:bodyPr/>
+                    <a:lstStyle/>
+                    <a:p>
+                      <a:pPr marL="0" lvl="0" indent="0">
+                        <a:buNone/>
+                      </a:pPr>
+                      <a:r>
                         <a:t>14.76%</a:t>
                       </a:r>
                     </a:p>
                   </a:txBody>
-                </a:tc>
-                <a:tc>
-                  <a:txBody>
-                    <a:bodyPr/>
-                    <a:lstStyle/>
-                    <a:p>
-                      <a:pPr lvl="0" indent="0" marL="0">
-                        <a:buNone/>
-                      </a:pPr>
-                      <a:r>
-                        <a:rPr/>
+                  <a:tcPr/>
+                </a:tc>
+                <a:tc>
+                  <a:txBody>
+                    <a:bodyPr/>
+                    <a:lstStyle/>
+                    <a:p>
+                      <a:pPr marL="0" lvl="0" indent="0">
+                        <a:buNone/>
+                      </a:pPr>
+                      <a:r>
                         <a:t>5.98%</a:t>
                       </a:r>
                     </a:p>
                   </a:txBody>
-                </a:tc>
-                <a:tc>
-                  <a:txBody>
-                    <a:bodyPr/>
-                    <a:lstStyle/>
-                    <a:p>
-                      <a:pPr lvl="0" indent="0" marL="0">
-                        <a:buNone/>
-                      </a:pPr>
-                      <a:r>
-                        <a:rPr/>
+                  <a:tcPr/>
+                </a:tc>
+                <a:tc>
+                  <a:txBody>
+                    <a:bodyPr/>
+                    <a:lstStyle/>
+                    <a:p>
+                      <a:pPr marL="0" lvl="0" indent="0">
+                        <a:buNone/>
+                      </a:pPr>
+                      <a:r>
                         <a:t>77.25%</a:t>
                       </a:r>
                     </a:p>
                   </a:txBody>
-                </a:tc>
-                <a:tc>
-                  <a:txBody>
-                    <a:bodyPr/>
-                    <a:lstStyle/>
-                    <a:p>
-                      <a:pPr lvl="0" indent="0" marL="0">
-                        <a:buNone/>
-                      </a:pPr>
-                      <a:r>
-                        <a:rPr/>
+                  <a:tcPr/>
+                </a:tc>
+                <a:tc>
+                  <a:txBody>
+                    <a:bodyPr/>
+                    <a:lstStyle/>
+                    <a:p>
+                      <a:pPr marL="0" lvl="0" indent="0">
+                        <a:buNone/>
+                      </a:pPr>
+                      <a:r>
                         <a:t>77.25%</a:t>
                       </a:r>
                     </a:p>
                   </a:txBody>
-                </a:tc>
+                  <a:tcPr/>
+                </a:tc>
+                <a:extLst>
+                  <a:ext uri="{0D108BD9-81ED-4DB2-BD59-A6C34878D82A}">
+                    <a16:rowId xmlns:a16="http://schemas.microsoft.com/office/drawing/2014/main" val="10001"/>
+                  </a:ext>
+                </a:extLst>
               </a:tr>
               <a:tr h="0">
                 <a:tc>
@@ -6396,136 +7047,141 @@
                     <a:bodyPr/>
                     <a:lstStyle/>
                     <a:p>
-                      <a:pPr lvl="0" indent="0" marL="0">
-                        <a:buNone/>
-                      </a:pPr>
-                      <a:r>
-                        <a:rPr/>
+                      <a:pPr marL="0" lvl="0" indent="0">
+                        <a:buNone/>
+                      </a:pPr>
+                      <a:r>
                         <a:t>Market</a:t>
                       </a:r>
                     </a:p>
                   </a:txBody>
-                </a:tc>
-                <a:tc>
-                  <a:txBody>
-                    <a:bodyPr/>
-                    <a:lstStyle/>
-                    <a:p>
-                      <a:pPr lvl="0" indent="0" marL="0">
-                        <a:buNone/>
-                      </a:pPr>
-                      <a:r>
-                        <a:rPr/>
+                  <a:tcPr/>
+                </a:tc>
+                <a:tc>
+                  <a:txBody>
+                    <a:bodyPr/>
+                    <a:lstStyle/>
+                    <a:p>
+                      <a:pPr marL="0" lvl="0" indent="0">
+                        <a:buNone/>
+                      </a:pPr>
+                      <a:r>
                         <a:t>0.17%</a:t>
                       </a:r>
                     </a:p>
                   </a:txBody>
-                </a:tc>
-                <a:tc>
-                  <a:txBody>
-                    <a:bodyPr/>
-                    <a:lstStyle/>
-                    <a:p>
-                      <a:pPr lvl="0" indent="0" marL="0">
-                        <a:buNone/>
-                      </a:pPr>
-                      <a:r>
-                        <a:rPr/>
+                  <a:tcPr/>
+                </a:tc>
+                <a:tc>
+                  <a:txBody>
+                    <a:bodyPr/>
+                    <a:lstStyle/>
+                    <a:p>
+                      <a:pPr marL="0" lvl="0" indent="0">
+                        <a:buNone/>
+                      </a:pPr>
+                      <a:r>
                         <a:t>12.54%</a:t>
                       </a:r>
                     </a:p>
                   </a:txBody>
-                </a:tc>
-                <a:tc>
-                  <a:txBody>
-                    <a:bodyPr/>
-                    <a:lstStyle/>
-                    <a:p>
-                      <a:pPr lvl="0" indent="0" marL="0">
-                        <a:buNone/>
-                      </a:pPr>
-                      <a:r>
-                        <a:rPr/>
+                  <a:tcPr/>
+                </a:tc>
+                <a:tc>
+                  <a:txBody>
+                    <a:bodyPr/>
+                    <a:lstStyle/>
+                    <a:p>
+                      <a:pPr marL="0" lvl="0" indent="0">
+                        <a:buNone/>
+                      </a:pPr>
+                      <a:r>
                         <a:t>-15.93%</a:t>
                       </a:r>
                     </a:p>
                   </a:txBody>
-                </a:tc>
-                <a:tc>
-                  <a:txBody>
-                    <a:bodyPr/>
-                    <a:lstStyle/>
-                    <a:p>
-                      <a:pPr lvl="0" indent="0" marL="0">
-                        <a:buNone/>
-                      </a:pPr>
-                      <a:r>
-                        <a:rPr/>
+                  <a:tcPr/>
+                </a:tc>
+                <a:tc>
+                  <a:txBody>
+                    <a:bodyPr/>
+                    <a:lstStyle/>
+                    <a:p>
+                      <a:pPr marL="0" lvl="0" indent="0">
+                        <a:buNone/>
+                      </a:pPr>
+                      <a:r>
                         <a:t>-15.93%</a:t>
                       </a:r>
                     </a:p>
                   </a:txBody>
-                </a:tc>
-                <a:tc>
-                  <a:txBody>
-                    <a:bodyPr/>
-                    <a:lstStyle/>
-                    <a:p>
-                      <a:pPr lvl="0" indent="0" marL="0">
-                        <a:buNone/>
-                      </a:pPr>
-                      <a:r>
-                        <a:rPr/>
+                  <a:tcPr/>
+                </a:tc>
+                <a:tc>
+                  <a:txBody>
+                    <a:bodyPr/>
+                    <a:lstStyle/>
+                    <a:p>
+                      <a:pPr marL="0" lvl="0" indent="0">
+                        <a:buNone/>
+                      </a:pPr>
+                      <a:r>
                         <a:t>-4.69%</a:t>
                       </a:r>
                     </a:p>
                   </a:txBody>
-                </a:tc>
-                <a:tc>
-                  <a:txBody>
-                    <a:bodyPr/>
-                    <a:lstStyle/>
-                    <a:p>
-                      <a:pPr lvl="0" indent="0" marL="0">
-                        <a:buNone/>
-                      </a:pPr>
-                      <a:r>
-                        <a:rPr/>
+                  <a:tcPr/>
+                </a:tc>
+                <a:tc>
+                  <a:txBody>
+                    <a:bodyPr/>
+                    <a:lstStyle/>
+                    <a:p>
+                      <a:pPr marL="0" lvl="0" indent="0">
+                        <a:buNone/>
+                      </a:pPr>
+                      <a:r>
                         <a:t>-5.15%</a:t>
                       </a:r>
                     </a:p>
                   </a:txBody>
-                </a:tc>
-                <a:tc>
-                  <a:txBody>
-                    <a:bodyPr/>
-                    <a:lstStyle/>
-                    <a:p>
-                      <a:pPr lvl="0" indent="0" marL="0">
-                        <a:buNone/>
-                      </a:pPr>
-                      <a:r>
-                        <a:rPr/>
+                  <a:tcPr/>
+                </a:tc>
+                <a:tc>
+                  <a:txBody>
+                    <a:bodyPr/>
+                    <a:lstStyle/>
+                    <a:p>
+                      <a:pPr marL="0" lvl="0" indent="0">
+                        <a:buNone/>
+                      </a:pPr>
+                      <a:r>
                         <a:t>31.03%</a:t>
                       </a:r>
                     </a:p>
                   </a:txBody>
-                </a:tc>
-                <a:tc>
-                  <a:txBody>
-                    <a:bodyPr/>
-                    <a:lstStyle/>
-                    <a:p>
-                      <a:pPr lvl="0" indent="0" marL="0">
-                        <a:buNone/>
-                      </a:pPr>
-                      <a:r>
-                        <a:rPr/>
+                  <a:tcPr/>
+                </a:tc>
+                <a:tc>
+                  <a:txBody>
+                    <a:bodyPr/>
+                    <a:lstStyle/>
+                    <a:p>
+                      <a:pPr marL="0" lvl="0" indent="0">
+                        <a:buNone/>
+                      </a:pPr>
+                      <a:r>
                         <a:t>31.03%</a:t>
                       </a:r>
                     </a:p>
                   </a:txBody>
-                </a:tc>
+                  <a:tcPr/>
+                </a:tc>
+                <a:extLst>
+                  <a:ext uri="{0D108BD9-81ED-4DB2-BD59-A6C34878D82A}">
+                    <a16:rowId xmlns:a16="http://schemas.microsoft.com/office/drawing/2014/main" val="10002"/>
+                  </a:ext>
+                </a:extLst>
               </a:tr>
               <a:tr h="0">
                 <a:tc>
@@ -6533,136 +7189,141 @@
                     <a:bodyPr/>
                     <a:lstStyle/>
                     <a:p>
-                      <a:pPr lvl="0" indent="0" marL="0">
-                        <a:buNone/>
-                      </a:pPr>
-                      <a:r>
-                        <a:rPr/>
+                      <a:pPr marL="0" lvl="0" indent="0">
+                        <a:buNone/>
+                      </a:pPr>
+                      <a:r>
                         <a:t>High esg_refinitive</a:t>
                       </a:r>
                     </a:p>
                   </a:txBody>
-                </a:tc>
-                <a:tc>
-                  <a:txBody>
-                    <a:bodyPr/>
-                    <a:lstStyle/>
-                    <a:p>
-                      <a:pPr lvl="0" indent="0" marL="0">
-                        <a:buNone/>
-                      </a:pPr>
-                      <a:r>
-                        <a:rPr/>
+                  <a:tcPr/>
+                </a:tc>
+                <a:tc>
+                  <a:txBody>
+                    <a:bodyPr/>
+                    <a:lstStyle/>
+                    <a:p>
+                      <a:pPr marL="0" lvl="0" indent="0">
+                        <a:buNone/>
+                      </a:pPr>
+                      <a:r>
                         <a:t>-5.10%</a:t>
                       </a:r>
                     </a:p>
                   </a:txBody>
-                </a:tc>
-                <a:tc>
-                  <a:txBody>
-                    <a:bodyPr/>
-                    <a:lstStyle/>
-                    <a:p>
-                      <a:pPr lvl="0" indent="0" marL="0">
-                        <a:buNone/>
-                      </a:pPr>
-                      <a:r>
-                        <a:rPr/>
+                  <a:tcPr/>
+                </a:tc>
+                <a:tc>
+                  <a:txBody>
+                    <a:bodyPr/>
+                    <a:lstStyle/>
+                    <a:p>
+                      <a:pPr marL="0" lvl="0" indent="0">
+                        <a:buNone/>
+                      </a:pPr>
+                      <a:r>
                         <a:t>2.69%</a:t>
                       </a:r>
                     </a:p>
                   </a:txBody>
-                </a:tc>
-                <a:tc>
-                  <a:txBody>
-                    <a:bodyPr/>
-                    <a:lstStyle/>
-                    <a:p>
-                      <a:pPr lvl="0" indent="0" marL="0">
-                        <a:buNone/>
-                      </a:pPr>
-                      <a:r>
-                        <a:rPr/>
+                  <a:tcPr/>
+                </a:tc>
+                <a:tc>
+                  <a:txBody>
+                    <a:bodyPr/>
+                    <a:lstStyle/>
+                    <a:p>
+                      <a:pPr marL="0" lvl="0" indent="0">
+                        <a:buNone/>
+                      </a:pPr>
+                      <a:r>
                         <a:t>2.55%</a:t>
                       </a:r>
                     </a:p>
                   </a:txBody>
-                </a:tc>
-                <a:tc>
-                  <a:txBody>
-                    <a:bodyPr/>
-                    <a:lstStyle/>
-                    <a:p>
-                      <a:pPr lvl="0" indent="0" marL="0">
-                        <a:buNone/>
-                      </a:pPr>
-                      <a:r>
-                        <a:rPr/>
+                  <a:tcPr/>
+                </a:tc>
+                <a:tc>
+                  <a:txBody>
+                    <a:bodyPr/>
+                    <a:lstStyle/>
+                    <a:p>
+                      <a:pPr marL="0" lvl="0" indent="0">
+                        <a:buNone/>
+                      </a:pPr>
+                      <a:r>
                         <a:t>2.55%</a:t>
                       </a:r>
                     </a:p>
                   </a:txBody>
-                </a:tc>
-                <a:tc>
-                  <a:txBody>
-                    <a:bodyPr/>
-                    <a:lstStyle/>
-                    <a:p>
-                      <a:pPr lvl="0" indent="0" marL="0">
-                        <a:buNone/>
-                      </a:pPr>
-                      <a:r>
-                        <a:rPr/>
+                  <a:tcPr/>
+                </a:tc>
+                <a:tc>
+                  <a:txBody>
+                    <a:bodyPr/>
+                    <a:lstStyle/>
+                    <a:p>
+                      <a:pPr marL="0" lvl="0" indent="0">
+                        <a:buNone/>
+                      </a:pPr>
+                      <a:r>
                         <a:t>21.02%</a:t>
                       </a:r>
                     </a:p>
                   </a:txBody>
-                </a:tc>
-                <a:tc>
-                  <a:txBody>
-                    <a:bodyPr/>
-                    <a:lstStyle/>
-                    <a:p>
-                      <a:pPr lvl="0" indent="0" marL="0">
-                        <a:buNone/>
-                      </a:pPr>
-                      <a:r>
-                        <a:rPr/>
+                  <a:tcPr/>
+                </a:tc>
+                <a:tc>
+                  <a:txBody>
+                    <a:bodyPr/>
+                    <a:lstStyle/>
+                    <a:p>
+                      <a:pPr marL="0" lvl="0" indent="0">
+                        <a:buNone/>
+                      </a:pPr>
+                      <a:r>
                         <a:t>12.11%</a:t>
                       </a:r>
                     </a:p>
                   </a:txBody>
-                </a:tc>
-                <a:tc>
-                  <a:txBody>
-                    <a:bodyPr/>
-                    <a:lstStyle/>
-                    <a:p>
-                      <a:pPr lvl="0" indent="0" marL="0">
-                        <a:buNone/>
-                      </a:pPr>
-                      <a:r>
-                        <a:rPr/>
+                  <a:tcPr/>
+                </a:tc>
+                <a:tc>
+                  <a:txBody>
+                    <a:bodyPr/>
+                    <a:lstStyle/>
+                    <a:p>
+                      <a:pPr marL="0" lvl="0" indent="0">
+                        <a:buNone/>
+                      </a:pPr>
+                      <a:r>
                         <a:t>85.80%</a:t>
                       </a:r>
                     </a:p>
                   </a:txBody>
-                </a:tc>
-                <a:tc>
-                  <a:txBody>
-                    <a:bodyPr/>
-                    <a:lstStyle/>
-                    <a:p>
-                      <a:pPr lvl="0" indent="0" marL="0">
-                        <a:buNone/>
-                      </a:pPr>
-                      <a:r>
-                        <a:rPr/>
+                  <a:tcPr/>
+                </a:tc>
+                <a:tc>
+                  <a:txBody>
+                    <a:bodyPr/>
+                    <a:lstStyle/>
+                    <a:p>
+                      <a:pPr marL="0" lvl="0" indent="0">
+                        <a:buNone/>
+                      </a:pPr>
+                      <a:r>
                         <a:t>85.80%</a:t>
                       </a:r>
                     </a:p>
                   </a:txBody>
-                </a:tc>
+                  <a:tcPr/>
+                </a:tc>
+                <a:extLst>
+                  <a:ext uri="{0D108BD9-81ED-4DB2-BD59-A6C34878D82A}">
+                    <a16:rowId xmlns:a16="http://schemas.microsoft.com/office/drawing/2014/main" val="10003"/>
+                  </a:ext>
+                </a:extLst>
               </a:tr>
               <a:tr h="0">
                 <a:tc>
@@ -6670,136 +7331,141 @@
                     <a:bodyPr/>
                     <a:lstStyle/>
                     <a:p>
-                      <a:pPr lvl="0" indent="0" marL="0">
-                        <a:buNone/>
-                      </a:pPr>
-                      <a:r>
-                        <a:rPr/>
+                      <a:pPr marL="0" lvl="0" indent="0">
+                        <a:buNone/>
+                      </a:pPr>
+                      <a:r>
                         <a:t>High transformation</a:t>
                       </a:r>
                     </a:p>
                   </a:txBody>
-                </a:tc>
-                <a:tc>
-                  <a:txBody>
-                    <a:bodyPr/>
-                    <a:lstStyle/>
-                    <a:p>
-                      <a:pPr lvl="0" indent="0" marL="0">
-                        <a:buNone/>
-                      </a:pPr>
-                      <a:r>
-                        <a:rPr/>
+                  <a:tcPr/>
+                </a:tc>
+                <a:tc>
+                  <a:txBody>
+                    <a:bodyPr/>
+                    <a:lstStyle/>
+                    <a:p>
+                      <a:pPr marL="0" lvl="0" indent="0">
+                        <a:buNone/>
+                      </a:pPr>
+                      <a:r>
                         <a:t>-3.98%</a:t>
                       </a:r>
                     </a:p>
                   </a:txBody>
-                </a:tc>
-                <a:tc>
-                  <a:txBody>
-                    <a:bodyPr/>
-                    <a:lstStyle/>
-                    <a:p>
-                      <a:pPr lvl="0" indent="0" marL="0">
-                        <a:buNone/>
-                      </a:pPr>
-                      <a:r>
-                        <a:rPr/>
+                  <a:tcPr/>
+                </a:tc>
+                <a:tc>
+                  <a:txBody>
+                    <a:bodyPr/>
+                    <a:lstStyle/>
+                    <a:p>
+                      <a:pPr marL="0" lvl="0" indent="0">
+                        <a:buNone/>
+                      </a:pPr>
+                      <a:r>
                         <a:t>0.25%</a:t>
                       </a:r>
                     </a:p>
                   </a:txBody>
-                </a:tc>
-                <a:tc>
-                  <a:txBody>
-                    <a:bodyPr/>
-                    <a:lstStyle/>
-                    <a:p>
-                      <a:pPr lvl="0" indent="0" marL="0">
-                        <a:buNone/>
-                      </a:pPr>
-                      <a:r>
-                        <a:rPr/>
+                  <a:tcPr/>
+                </a:tc>
+                <a:tc>
+                  <a:txBody>
+                    <a:bodyPr/>
+                    <a:lstStyle/>
+                    <a:p>
+                      <a:pPr marL="0" lvl="0" indent="0">
+                        <a:buNone/>
+                      </a:pPr>
+                      <a:r>
                         <a:t>0.12%</a:t>
                       </a:r>
                     </a:p>
                   </a:txBody>
-                </a:tc>
-                <a:tc>
-                  <a:txBody>
-                    <a:bodyPr/>
-                    <a:lstStyle/>
-                    <a:p>
-                      <a:pPr lvl="0" indent="0" marL="0">
-                        <a:buNone/>
-                      </a:pPr>
-                      <a:r>
-                        <a:rPr/>
+                  <a:tcPr/>
+                </a:tc>
+                <a:tc>
+                  <a:txBody>
+                    <a:bodyPr/>
+                    <a:lstStyle/>
+                    <a:p>
+                      <a:pPr marL="0" lvl="0" indent="0">
+                        <a:buNone/>
+                      </a:pPr>
+                      <a:r>
                         <a:t>0.12%</a:t>
                       </a:r>
                     </a:p>
                   </a:txBody>
-                </a:tc>
-                <a:tc>
-                  <a:txBody>
-                    <a:bodyPr/>
-                    <a:lstStyle/>
-                    <a:p>
-                      <a:pPr lvl="0" indent="0" marL="0">
-                        <a:buNone/>
-                      </a:pPr>
-                      <a:r>
-                        <a:rPr/>
+                  <a:tcPr/>
+                </a:tc>
+                <a:tc>
+                  <a:txBody>
+                    <a:bodyPr/>
+                    <a:lstStyle/>
+                    <a:p>
+                      <a:pPr marL="0" lvl="0" indent="0">
+                        <a:buNone/>
+                      </a:pPr>
+                      <a:r>
                         <a:t>12.01%</a:t>
                       </a:r>
                     </a:p>
                   </a:txBody>
-                </a:tc>
-                <a:tc>
-                  <a:txBody>
-                    <a:bodyPr/>
-                    <a:lstStyle/>
-                    <a:p>
-                      <a:pPr lvl="0" indent="0" marL="0">
-                        <a:buNone/>
-                      </a:pPr>
-                      <a:r>
-                        <a:rPr/>
+                  <a:tcPr/>
+                </a:tc>
+                <a:tc>
+                  <a:txBody>
+                    <a:bodyPr/>
+                    <a:lstStyle/>
+                    <a:p>
+                      <a:pPr marL="0" lvl="0" indent="0">
+                        <a:buNone/>
+                      </a:pPr>
+                      <a:r>
                         <a:t>-0.12%</a:t>
                       </a:r>
                     </a:p>
                   </a:txBody>
-                </a:tc>
-                <a:tc>
-                  <a:txBody>
-                    <a:bodyPr/>
-                    <a:lstStyle/>
-                    <a:p>
-                      <a:pPr lvl="0" indent="0" marL="0">
-                        <a:buNone/>
-                      </a:pPr>
-                      <a:r>
-                        <a:rPr/>
+                  <a:tcPr/>
+                </a:tc>
+                <a:tc>
+                  <a:txBody>
+                    <a:bodyPr/>
+                    <a:lstStyle/>
+                    <a:p>
+                      <a:pPr marL="0" lvl="0" indent="0">
+                        <a:buNone/>
+                      </a:pPr>
+                      <a:r>
                         <a:t>60.36%</a:t>
                       </a:r>
                     </a:p>
                   </a:txBody>
-                </a:tc>
-                <a:tc>
-                  <a:txBody>
-                    <a:bodyPr/>
-                    <a:lstStyle/>
-                    <a:p>
-                      <a:pPr lvl="0" indent="0" marL="0">
-                        <a:buNone/>
-                      </a:pPr>
-                      <a:r>
-                        <a:rPr/>
+                  <a:tcPr/>
+                </a:tc>
+                <a:tc>
+                  <a:txBody>
+                    <a:bodyPr/>
+                    <a:lstStyle/>
+                    <a:p>
+                      <a:pPr marL="0" lvl="0" indent="0">
+                        <a:buNone/>
+                      </a:pPr>
+                      <a:r>
                         <a:t>60.36%</a:t>
                       </a:r>
                     </a:p>
                   </a:txBody>
-                </a:tc>
+                  <a:tcPr/>
+                </a:tc>
+                <a:extLst>
+                  <a:ext uri="{0D108BD9-81ED-4DB2-BD59-A6C34878D82A}">
+                    <a16:rowId xmlns:a16="http://schemas.microsoft.com/office/drawing/2014/main" val="10004"/>
+                  </a:ext>
+                </a:extLst>
               </a:tr>
               <a:tr h="0">
                 <a:tc>
@@ -6807,136 +7473,141 @@
                     <a:bodyPr/>
                     <a:lstStyle/>
                     <a:p>
-                      <a:pPr lvl="0" indent="0" marL="0">
-                        <a:buNone/>
-                      </a:pPr>
-                      <a:r>
-                        <a:rPr/>
+                      <a:pPr marL="0" lvl="0" indent="0">
+                        <a:buNone/>
+                      </a:pPr>
+                      <a:r>
                         <a:t>High preparation</a:t>
                       </a:r>
                     </a:p>
                   </a:txBody>
-                </a:tc>
-                <a:tc>
-                  <a:txBody>
-                    <a:bodyPr/>
-                    <a:lstStyle/>
-                    <a:p>
-                      <a:pPr lvl="0" indent="0" marL="0">
-                        <a:buNone/>
-                      </a:pPr>
-                      <a:r>
-                        <a:rPr/>
+                  <a:tcPr/>
+                </a:tc>
+                <a:tc>
+                  <a:txBody>
+                    <a:bodyPr/>
+                    <a:lstStyle/>
+                    <a:p>
+                      <a:pPr marL="0" lvl="0" indent="0">
+                        <a:buNone/>
+                      </a:pPr>
+                      <a:r>
                         <a:t>-4.41%</a:t>
                       </a:r>
                     </a:p>
                   </a:txBody>
-                </a:tc>
-                <a:tc>
-                  <a:txBody>
-                    <a:bodyPr/>
-                    <a:lstStyle/>
-                    <a:p>
-                      <a:pPr lvl="0" indent="0" marL="0">
-                        <a:buNone/>
-                      </a:pPr>
-                      <a:r>
-                        <a:rPr/>
+                  <a:tcPr/>
+                </a:tc>
+                <a:tc>
+                  <a:txBody>
+                    <a:bodyPr/>
+                    <a:lstStyle/>
+                    <a:p>
+                      <a:pPr marL="0" lvl="0" indent="0">
+                        <a:buNone/>
+                      </a:pPr>
+                      <a:r>
                         <a:t>3.35%</a:t>
                       </a:r>
                     </a:p>
                   </a:txBody>
-                </a:tc>
-                <a:tc>
-                  <a:txBody>
-                    <a:bodyPr/>
-                    <a:lstStyle/>
-                    <a:p>
-                      <a:pPr lvl="0" indent="0" marL="0">
-                        <a:buNone/>
-                      </a:pPr>
-                      <a:r>
-                        <a:rPr/>
+                  <a:tcPr/>
+                </a:tc>
+                <a:tc>
+                  <a:txBody>
+                    <a:bodyPr/>
+                    <a:lstStyle/>
+                    <a:p>
+                      <a:pPr marL="0" lvl="0" indent="0">
+                        <a:buNone/>
+                      </a:pPr>
+                      <a:r>
                         <a:t>2.33%</a:t>
                       </a:r>
                     </a:p>
                   </a:txBody>
-                </a:tc>
-                <a:tc>
-                  <a:txBody>
-                    <a:bodyPr/>
-                    <a:lstStyle/>
-                    <a:p>
-                      <a:pPr lvl="0" indent="0" marL="0">
-                        <a:buNone/>
-                      </a:pPr>
-                      <a:r>
-                        <a:rPr/>
+                  <a:tcPr/>
+                </a:tc>
+                <a:tc>
+                  <a:txBody>
+                    <a:bodyPr/>
+                    <a:lstStyle/>
+                    <a:p>
+                      <a:pPr marL="0" lvl="0" indent="0">
+                        <a:buNone/>
+                      </a:pPr>
+                      <a:r>
                         <a:t>2.33%</a:t>
                       </a:r>
                     </a:p>
                   </a:txBody>
-                </a:tc>
-                <a:tc>
-                  <a:txBody>
-                    <a:bodyPr/>
-                    <a:lstStyle/>
-                    <a:p>
-                      <a:pPr lvl="0" indent="0" marL="0">
-                        <a:buNone/>
-                      </a:pPr>
-                      <a:r>
-                        <a:rPr/>
+                  <a:tcPr/>
+                </a:tc>
+                <a:tc>
+                  <a:txBody>
+                    <a:bodyPr/>
+                    <a:lstStyle/>
+                    <a:p>
+                      <a:pPr marL="0" lvl="0" indent="0">
+                        <a:buNone/>
+                      </a:pPr>
+                      <a:r>
                         <a:t>23.43%</a:t>
                       </a:r>
                     </a:p>
                   </a:txBody>
-                </a:tc>
-                <a:tc>
-                  <a:txBody>
-                    <a:bodyPr/>
-                    <a:lstStyle/>
-                    <a:p>
-                      <a:pPr lvl="0" indent="0" marL="0">
-                        <a:buNone/>
-                      </a:pPr>
-                      <a:r>
-                        <a:rPr/>
+                  <a:tcPr/>
+                </a:tc>
+                <a:tc>
+                  <a:txBody>
+                    <a:bodyPr/>
+                    <a:lstStyle/>
+                    <a:p>
+                      <a:pPr marL="0" lvl="0" indent="0">
+                        <a:buNone/>
+                      </a:pPr>
+                      <a:r>
                         <a:t>21.30%</a:t>
                       </a:r>
                     </a:p>
                   </a:txBody>
-                </a:tc>
-                <a:tc>
-                  <a:txBody>
-                    <a:bodyPr/>
-                    <a:lstStyle/>
-                    <a:p>
-                      <a:pPr lvl="0" indent="0" marL="0">
-                        <a:buNone/>
-                      </a:pPr>
-                      <a:r>
-                        <a:rPr/>
+                  <a:tcPr/>
+                </a:tc>
+                <a:tc>
+                  <a:txBody>
+                    <a:bodyPr/>
+                    <a:lstStyle/>
+                    <a:p>
+                      <a:pPr marL="0" lvl="0" indent="0">
+                        <a:buNone/>
+                      </a:pPr>
+                      <a:r>
                         <a:t>103.34%</a:t>
                       </a:r>
                     </a:p>
                   </a:txBody>
-                </a:tc>
-                <a:tc>
-                  <a:txBody>
-                    <a:bodyPr/>
-                    <a:lstStyle/>
-                    <a:p>
-                      <a:pPr lvl="0" indent="0" marL="0">
-                        <a:buNone/>
-                      </a:pPr>
-                      <a:r>
-                        <a:rPr/>
+                  <a:tcPr/>
+                </a:tc>
+                <a:tc>
+                  <a:txBody>
+                    <a:bodyPr/>
+                    <a:lstStyle/>
+                    <a:p>
+                      <a:pPr marL="0" lvl="0" indent="0">
+                        <a:buNone/>
+                      </a:pPr>
+                      <a:r>
                         <a:t>103.34%</a:t>
                       </a:r>
                     </a:p>
                   </a:txBody>
-                </a:tc>
+                  <a:tcPr/>
+                </a:tc>
+                <a:extLst>
+                  <a:ext uri="{0D108BD9-81ED-4DB2-BD59-A6C34878D82A}">
+                    <a16:rowId xmlns:a16="http://schemas.microsoft.com/office/drawing/2014/main" val="10005"/>
+                  </a:ext>
+                </a:extLst>
               </a:tr>
             </a:tbl>
           </a:graphicData>
@@ -6944,6 +7615,9 @@
       </p:graphicFrame>
     </p:spTree>
   </p:cSld>
+  <p:clrMapOvr>
+    <a:masterClrMapping/>
+  </p:clrMapOvr>
 </p:sld>
 </file>
 
@@ -7278,44 +7952,44 @@
         <a:sysClr val="window" lastClr="FFFFFF"/>
       </a:lt1>
       <a:dk2>
-        <a:srgbClr val="44546A"/>
+        <a:srgbClr val="0E2841"/>
       </a:dk2>
       <a:lt2>
-        <a:srgbClr val="E7E6E6"/>
+        <a:srgbClr val="E8E8E8"/>
       </a:lt2>
       <a:accent1>
-        <a:srgbClr val="5B9BD5"/>
+        <a:srgbClr val="156082"/>
       </a:accent1>
       <a:accent2>
-        <a:srgbClr val="ED7D31"/>
+        <a:srgbClr val="E97132"/>
       </a:accent2>
       <a:accent3>
-        <a:srgbClr val="A5A5A5"/>
+        <a:srgbClr val="196B24"/>
       </a:accent3>
       <a:accent4>
-        <a:srgbClr val="FFC000"/>
+        <a:srgbClr val="0F9ED5"/>
       </a:accent4>
       <a:accent5>
-        <a:srgbClr val="4472C4"/>
+        <a:srgbClr val="A02B93"/>
       </a:accent5>
       <a:accent6>
-        <a:srgbClr val="70AD47"/>
+        <a:srgbClr val="4EA72E"/>
       </a:accent6>
       <a:hlink>
-        <a:srgbClr val="0563C1"/>
+        <a:srgbClr val="467886"/>
       </a:hlink>
       <a:folHlink>
-        <a:srgbClr val="954F72"/>
+        <a:srgbClr val="96607D"/>
       </a:folHlink>
     </a:clrScheme>
     <a:fontScheme name="Office">
       <a:majorFont>
-        <a:latin typeface="Calibri Light" panose="020F0302020204030204"/>
+        <a:latin typeface="Aptos Display" panose="02110004020202020204"/>
         <a:ea typeface=""/>
         <a:cs typeface=""/>
-        <a:font script="Jpan" typeface="ＭＳ Ｐゴシック"/>
+        <a:font script="Jpan" typeface="游ゴシック Light"/>
         <a:font script="Hang" typeface="맑은 고딕"/>
-        <a:font script="Hans" typeface="宋体"/>
+        <a:font script="Hans" typeface="等线 Light"/>
         <a:font script="Hant" typeface="新細明體"/>
         <a:font script="Arab" typeface="Times New Roman"/>
         <a:font script="Hebr" typeface="Times New Roman"/>
@@ -7343,14 +8017,31 @@
         <a:font script="Viet" typeface="Times New Roman"/>
         <a:font script="Uigh" typeface="Microsoft Uighur"/>
         <a:font script="Geor" typeface="Sylfaen"/>
+        <a:font script="Armn" typeface="Arial"/>
+        <a:font script="Bugi" typeface="Leelawadee UI"/>
+        <a:font script="Bopo" typeface="Microsoft JhengHei"/>
+        <a:font script="Java" typeface="Javanese Text"/>
+        <a:font script="Lisu" typeface="Segoe UI"/>
+        <a:font script="Mymr" typeface="Myanmar Text"/>
+        <a:font script="Nkoo" typeface="Ebrima"/>
+        <a:font script="Olck" typeface="Nirmala UI"/>
+        <a:font script="Osma" typeface="Ebrima"/>
+        <a:font script="Phag" typeface="Phagspa"/>
+        <a:font script="Syrn" typeface="Estrangelo Edessa"/>
+        <a:font script="Syrj" typeface="Estrangelo Edessa"/>
+        <a:font script="Syre" typeface="Estrangelo Edessa"/>
+        <a:font script="Sora" typeface="Nirmala UI"/>
+        <a:font script="Tale" typeface="Microsoft Tai Le"/>
+        <a:font script="Talu" typeface="Microsoft New Tai Lue"/>
+        <a:font script="Tfng" typeface="Ebrima"/>
       </a:majorFont>
       <a:minorFont>
-        <a:latin typeface="Calibri" panose="020F0502020204030204"/>
+        <a:latin typeface="Aptos" panose="02110004020202020204"/>
         <a:ea typeface=""/>
         <a:cs typeface=""/>
-        <a:font script="Jpan" typeface="ＭＳ Ｐゴシック"/>
+        <a:font script="Jpan" typeface="游ゴシック"/>
         <a:font script="Hang" typeface="맑은 고딕"/>
-        <a:font script="Hans" typeface="宋体"/>
+        <a:font script="Hans" typeface="等线"/>
         <a:font script="Hant" typeface="新細明體"/>
         <a:font script="Arab" typeface="Arial"/>
         <a:font script="Hebr" typeface="Arial"/>
@@ -7378,6 +8069,23 @@
         <a:font script="Viet" typeface="Arial"/>
         <a:font script="Uigh" typeface="Microsoft Uighur"/>
         <a:font script="Geor" typeface="Sylfaen"/>
+        <a:font script="Armn" typeface="Arial"/>
+        <a:font script="Bugi" typeface="Leelawadee UI"/>
+        <a:font script="Bopo" typeface="Microsoft JhengHei"/>
+        <a:font script="Java" typeface="Javanese Text"/>
+        <a:font script="Lisu" typeface="Segoe UI"/>
+        <a:font script="Mymr" typeface="Myanmar Text"/>
+        <a:font script="Nkoo" typeface="Ebrima"/>
+        <a:font script="Olck" typeface="Nirmala UI"/>
+        <a:font script="Osma" typeface="Ebrima"/>
+        <a:font script="Phag" typeface="Phagspa"/>
+        <a:font script="Syrn" typeface="Estrangelo Edessa"/>
+        <a:font script="Syrj" typeface="Estrangelo Edessa"/>
+        <a:font script="Syre" typeface="Estrangelo Edessa"/>
+        <a:font script="Sora" typeface="Nirmala UI"/>
+        <a:font script="Tale" typeface="Microsoft Tai Le"/>
+        <a:font script="Talu" typeface="Microsoft New Tai Lue"/>
+        <a:font script="Tfng" typeface="Ebrima"/>
       </a:minorFont>
     </a:fontScheme>
     <a:fmtScheme name="Office">
@@ -7439,13 +8147,6 @@
         </a:gradFill>
       </a:fillStyleLst>
       <a:lnStyleLst>
-        <a:ln w="6350" cap="flat" cmpd="sng" algn="ctr">
-          <a:solidFill>
-            <a:schemeClr val="phClr"/>
-          </a:solidFill>
-          <a:prstDash val="solid"/>
-          <a:miter lim="800000"/>
-        </a:ln>
         <a:ln w="12700" cap="flat" cmpd="sng" algn="ctr">
           <a:solidFill>
             <a:schemeClr val="phClr"/>
@@ -7454,6 +8155,13 @@
           <a:miter lim="800000"/>
         </a:ln>
         <a:ln w="19050" cap="flat" cmpd="sng" algn="ctr">
+          <a:solidFill>
+            <a:schemeClr val="phClr"/>
+          </a:solidFill>
+          <a:prstDash val="solid"/>
+          <a:miter lim="800000"/>
+        </a:ln>
+        <a:ln w="25400" cap="flat" cmpd="sng" algn="ctr">
           <a:solidFill>
             <a:schemeClr val="phClr"/>
           </a:solidFill>
@@ -7518,11 +8226,31 @@
       </a:bgFillStyleLst>
     </a:fmtScheme>
   </a:themeElements>
-  <a:objectDefaults/>
+  <a:objectDefaults>
+    <a:lnDef>
+      <a:spPr/>
+      <a:bodyPr/>
+      <a:lstStyle/>
+      <a:style>
+        <a:lnRef idx="2">
+          <a:schemeClr val="accent1"/>
+        </a:lnRef>
+        <a:fillRef idx="0">
+          <a:schemeClr val="accent1"/>
+        </a:fillRef>
+        <a:effectRef idx="1">
+          <a:schemeClr val="accent1"/>
+        </a:effectRef>
+        <a:fontRef idx="minor">
+          <a:schemeClr val="tx1"/>
+        </a:fontRef>
+      </a:style>
+    </a:lnDef>
+  </a:objectDefaults>
   <a:extraClrSchemeLst/>
   <a:extLst>
     <a:ext uri="{05A4C25C-085E-4340-85A3-A5531E510DB2}">
-      <thm15:themeFamily xmlns:thm15="http://schemas.microsoft.com/office/thememl/2012/main" name="Office Theme" id="{62F939B6-93AF-4DB8-9C6B-D6C7DFDC589F}" vid="{4A3C46E8-61CC-4603-A589-7422A47A8E4A}"/>
+      <thm15:themeFamily xmlns:thm15="http://schemas.microsoft.com/office/thememl/2012/main" name="Office Theme" id="{2E142A2C-CD16-42D6-873A-C26D2A0506FA}" vid="{1BDDFF52-6CD6-40A5-AB3C-68EB2F1E4D0A}"/>
     </a:ext>
   </a:extLst>
 </a:theme>
